--- a/exports/pptx/lessons/senior-module-08-yoga/day-04-sun-salutation.pptx
+++ b/exports/pptx/lessons/senior-module-08-yoga/day-04-sun-salutation.pptx
@@ -16,9 +16,12 @@
     <p:sldId id="264" r:id="rId10"/>
     <p:sldId id="265" r:id="rId11"/>
     <p:sldId id="266" r:id="rId12"/>
+    <p:sldId id="267" r:id="rId13"/>
+    <p:sldId id="268" r:id="rId14"/>
+    <p:sldId id="269" r:id="rId15"/>
   </p:sldIdLst>
   <p:notesMasterIdLst>
-    <p:notesMasterId r:id="rId13"/>
+    <p:notesMasterId r:id="rId16"/>
   </p:notesMasterIdLst>
   <p:sldSz cx="9144000" cy="5143500"/>
   <p:notesSz cx="5143500" cy="9144000"/>
@@ -712,6 +715,270 @@
             <a:fld id="{F7021451-1387-4CA6-816F-3879F97B5CBC}" type="slidenum">
               <a:rPr lang="en-US"/>
               <a:t>11</a:t>
+            </a:fld>
+            <a:endParaRPr lang="en-US"/>
+          </a:p>
+        </p:txBody>
+      </p:sp>
+    </p:spTree>
+    <p:extLst>
+      <p:ext uri="{BB962C8B-B14F-4D97-AF65-F5344CB8AC3E}">
+        <p14:creationId xmlns:p14="http://schemas.microsoft.com/office/powerpoint/2010/main" val="1024086991"/>
+      </p:ext>
+    </p:extLst>
+  </p:cSld>
+  <p:clrMapOvr>
+    <a:masterClrMapping/>
+  </p:clrMapOvr>
+</p:notes>
+</file>
+
+<file path=ppt/notesSlides/notesSlide12.xml><?xml version="1.0" encoding="utf-8"?>
+<p:notes xmlns:a="http://schemas.openxmlformats.org/drawingml/2006/main" xmlns:r="http://schemas.openxmlformats.org/officeDocument/2006/relationships" xmlns:p="http://schemas.openxmlformats.org/presentationml/2006/main">
+  <p:cSld>
+    <p:spTree>
+      <p:nvGrpSpPr>
+        <p:cNvPr id="1" name=""/>
+        <p:cNvGrpSpPr/>
+        <p:nvPr/>
+      </p:nvGrpSpPr>
+      <p:grpSpPr>
+        <a:xfrm>
+          <a:off x="0" y="0"/>
+          <a:ext cx="0" cy="0"/>
+          <a:chOff x="0" y="0"/>
+          <a:chExt cx="0" cy="0"/>
+        </a:xfrm>
+      </p:grpSpPr>
+      <p:sp>
+        <p:nvSpPr>
+          <p:cNvPr id="2" name="Slide Image Placeholder 1"/>
+          <p:cNvSpPr>
+            <a:spLocks noGrp="1" noRot="1" noChangeAspect="1"/>
+          </p:cNvSpPr>
+          <p:nvPr>
+            <p:ph type="sldImg"/>
+          </p:nvPr>
+        </p:nvSpPr>
+        <p:spPr/>
+      </p:sp>
+      <p:sp>
+        <p:nvSpPr>
+          <p:cNvPr id="3" name="Notes Placeholder 2"/>
+          <p:cNvSpPr>
+            <a:spLocks noGrp="1"/>
+          </p:cNvSpPr>
+          <p:nvPr>
+            <p:ph type="body" idx="1"/>
+          </p:nvPr>
+        </p:nvSpPr>
+        <p:spPr/>
+        <p:txBody>
+          <a:bodyPr/>
+          <a:lstStyle/>
+          <a:p>
+            <a:r>
+              <a:rPr lang="en-US" dirty="0"/>
+              <a:t/>
+            </a:r>
+            <a:endParaRPr lang="en-US" dirty="0"/>
+          </a:p>
+        </p:txBody>
+      </p:sp>
+      <p:sp>
+        <p:nvSpPr>
+          <p:cNvPr id="4" name="Slide Number Placeholder 3"/>
+          <p:cNvSpPr>
+            <a:spLocks noGrp="1"/>
+          </p:cNvSpPr>
+          <p:nvPr>
+            <p:ph type="sldNum" sz="quarter" idx="10"/>
+          </p:nvPr>
+        </p:nvSpPr>
+        <p:spPr/>
+        <p:txBody>
+          <a:bodyPr/>
+          <a:lstStyle/>
+          <a:p>
+            <a:fld id="{F7021451-1387-4CA6-816F-3879F97B5CBC}" type="slidenum">
+              <a:rPr lang="en-US"/>
+              <a:t>12</a:t>
+            </a:fld>
+            <a:endParaRPr lang="en-US"/>
+          </a:p>
+        </p:txBody>
+      </p:sp>
+    </p:spTree>
+    <p:extLst>
+      <p:ext uri="{BB962C8B-B14F-4D97-AF65-F5344CB8AC3E}">
+        <p14:creationId xmlns:p14="http://schemas.microsoft.com/office/powerpoint/2010/main" val="1024086991"/>
+      </p:ext>
+    </p:extLst>
+  </p:cSld>
+  <p:clrMapOvr>
+    <a:masterClrMapping/>
+  </p:clrMapOvr>
+</p:notes>
+</file>
+
+<file path=ppt/notesSlides/notesSlide13.xml><?xml version="1.0" encoding="utf-8"?>
+<p:notes xmlns:a="http://schemas.openxmlformats.org/drawingml/2006/main" xmlns:r="http://schemas.openxmlformats.org/officeDocument/2006/relationships" xmlns:p="http://schemas.openxmlformats.org/presentationml/2006/main">
+  <p:cSld>
+    <p:spTree>
+      <p:nvGrpSpPr>
+        <p:cNvPr id="1" name=""/>
+        <p:cNvGrpSpPr/>
+        <p:nvPr/>
+      </p:nvGrpSpPr>
+      <p:grpSpPr>
+        <a:xfrm>
+          <a:off x="0" y="0"/>
+          <a:ext cx="0" cy="0"/>
+          <a:chOff x="0" y="0"/>
+          <a:chExt cx="0" cy="0"/>
+        </a:xfrm>
+      </p:grpSpPr>
+      <p:sp>
+        <p:nvSpPr>
+          <p:cNvPr id="2" name="Slide Image Placeholder 1"/>
+          <p:cNvSpPr>
+            <a:spLocks noGrp="1" noRot="1" noChangeAspect="1"/>
+          </p:cNvSpPr>
+          <p:nvPr>
+            <p:ph type="sldImg"/>
+          </p:nvPr>
+        </p:nvSpPr>
+        <p:spPr/>
+      </p:sp>
+      <p:sp>
+        <p:nvSpPr>
+          <p:cNvPr id="3" name="Notes Placeholder 2"/>
+          <p:cNvSpPr>
+            <a:spLocks noGrp="1"/>
+          </p:cNvSpPr>
+          <p:nvPr>
+            <p:ph type="body" idx="1"/>
+          </p:nvPr>
+        </p:nvSpPr>
+        <p:spPr/>
+        <p:txBody>
+          <a:bodyPr/>
+          <a:lstStyle/>
+          <a:p>
+            <a:r>
+              <a:rPr lang="en-US" dirty="0"/>
+              <a:t/>
+            </a:r>
+            <a:endParaRPr lang="en-US" dirty="0"/>
+          </a:p>
+        </p:txBody>
+      </p:sp>
+      <p:sp>
+        <p:nvSpPr>
+          <p:cNvPr id="4" name="Slide Number Placeholder 3"/>
+          <p:cNvSpPr>
+            <a:spLocks noGrp="1"/>
+          </p:cNvSpPr>
+          <p:nvPr>
+            <p:ph type="sldNum" sz="quarter" idx="10"/>
+          </p:nvPr>
+        </p:nvSpPr>
+        <p:spPr/>
+        <p:txBody>
+          <a:bodyPr/>
+          <a:lstStyle/>
+          <a:p>
+            <a:fld id="{F7021451-1387-4CA6-816F-3879F97B5CBC}" type="slidenum">
+              <a:rPr lang="en-US"/>
+              <a:t>13</a:t>
+            </a:fld>
+            <a:endParaRPr lang="en-US"/>
+          </a:p>
+        </p:txBody>
+      </p:sp>
+    </p:spTree>
+    <p:extLst>
+      <p:ext uri="{BB962C8B-B14F-4D97-AF65-F5344CB8AC3E}">
+        <p14:creationId xmlns:p14="http://schemas.microsoft.com/office/powerpoint/2010/main" val="1024086991"/>
+      </p:ext>
+    </p:extLst>
+  </p:cSld>
+  <p:clrMapOvr>
+    <a:masterClrMapping/>
+  </p:clrMapOvr>
+</p:notes>
+</file>
+
+<file path=ppt/notesSlides/notesSlide14.xml><?xml version="1.0" encoding="utf-8"?>
+<p:notes xmlns:a="http://schemas.openxmlformats.org/drawingml/2006/main" xmlns:r="http://schemas.openxmlformats.org/officeDocument/2006/relationships" xmlns:p="http://schemas.openxmlformats.org/presentationml/2006/main">
+  <p:cSld>
+    <p:spTree>
+      <p:nvGrpSpPr>
+        <p:cNvPr id="1" name=""/>
+        <p:cNvGrpSpPr/>
+        <p:nvPr/>
+      </p:nvGrpSpPr>
+      <p:grpSpPr>
+        <a:xfrm>
+          <a:off x="0" y="0"/>
+          <a:ext cx="0" cy="0"/>
+          <a:chOff x="0" y="0"/>
+          <a:chExt cx="0" cy="0"/>
+        </a:xfrm>
+      </p:grpSpPr>
+      <p:sp>
+        <p:nvSpPr>
+          <p:cNvPr id="2" name="Slide Image Placeholder 1"/>
+          <p:cNvSpPr>
+            <a:spLocks noGrp="1" noRot="1" noChangeAspect="1"/>
+          </p:cNvSpPr>
+          <p:nvPr>
+            <p:ph type="sldImg"/>
+          </p:nvPr>
+        </p:nvSpPr>
+        <p:spPr/>
+      </p:sp>
+      <p:sp>
+        <p:nvSpPr>
+          <p:cNvPr id="3" name="Notes Placeholder 2"/>
+          <p:cNvSpPr>
+            <a:spLocks noGrp="1"/>
+          </p:cNvSpPr>
+          <p:nvPr>
+            <p:ph type="body" idx="1"/>
+          </p:nvPr>
+        </p:nvSpPr>
+        <p:spPr/>
+        <p:txBody>
+          <a:bodyPr/>
+          <a:lstStyle/>
+          <a:p>
+            <a:r>
+              <a:rPr lang="en-US" dirty="0"/>
+              <a:t/>
+            </a:r>
+            <a:endParaRPr lang="en-US" dirty="0"/>
+          </a:p>
+        </p:txBody>
+      </p:sp>
+      <p:sp>
+        <p:nvSpPr>
+          <p:cNvPr id="4" name="Slide Number Placeholder 3"/>
+          <p:cNvSpPr>
+            <a:spLocks noGrp="1"/>
+          </p:cNvSpPr>
+          <p:nvPr>
+            <p:ph type="sldNum" sz="quarter" idx="10"/>
+          </p:nvPr>
+        </p:nvSpPr>
+        <p:spPr/>
+        <p:txBody>
+          <a:bodyPr/>
+          <a:lstStyle/>
+          <a:p>
+            <a:fld id="{F7021451-1387-4CA6-816F-3879F97B5CBC}" type="slidenum">
+              <a:rPr lang="en-US"/>
+              <a:t>14</a:t>
             </a:fld>
             <a:endParaRPr lang="en-US"/>
           </a:p>
@@ -1965,102 +2232,6 @@
         </p:nvSpPr>
         <p:spPr>
           <a:xfrm>
-            <a:off x="406301" y="1223963"/>
-            <a:ext cx="8498026" cy="274290"/>
-          </a:xfrm>
-          <a:prstGeom prst="rect">
-            <a:avLst/>
-          </a:prstGeom>
-          <a:noFill/>
-          <a:ln/>
-        </p:spPr>
-        <p:txBody>
-          <a:bodyPr wrap="square" lIns="0" tIns="0" rIns="0" bIns="0" rtlCol="0" anchor="t"/>
-          <a:lstStyle/>
-          <a:p>
-            <a:pPr algn="l" indent="0" marL="0">
-              <a:lnSpc>
-                <a:spcPts val="2160"/>
-              </a:lnSpc>
-              <a:spcBef>
-                <a:spcPts val="600"/>
-              </a:spcBef>
-              <a:spcAft>
-                <a:spcPts val="800"/>
-              </a:spcAft>
-              <a:buNone/>
-            </a:pPr>
-            <a:r>
-              <a:rPr lang="en-US" sz="1800" b="1" dirty="0">
-                <a:solidFill>
-                  <a:srgbClr val="997929"/>
-                </a:solidFill>
-                <a:latin typeface="Times New Roman" pitchFamily="34" charset="0"/>
-                <a:ea typeface="Times New Roman" pitchFamily="34" charset="-122"/>
-                <a:cs typeface="Times New Roman" pitchFamily="34" charset="-120"/>
-              </a:rPr>
-              <a:t>Learning objective</a:t>
-            </a:r>
-            <a:endParaRPr lang="en-US" sz="1800" dirty="0"/>
-          </a:p>
-        </p:txBody>
-      </p:sp>
-      <p:sp>
-        <p:nvSpPr>
-          <p:cNvPr id="6" name="Text 4"/>
-          <p:cNvSpPr/>
-          <p:nvPr/>
-        </p:nvSpPr>
-        <p:spPr>
-          <a:xfrm>
-            <a:off x="406301" y="1637854"/>
-            <a:ext cx="8498026" cy="426541"/>
-          </a:xfrm>
-          <a:prstGeom prst="rect">
-            <a:avLst/>
-          </a:prstGeom>
-          <a:noFill/>
-          <a:ln/>
-        </p:spPr>
-        <p:txBody>
-          <a:bodyPr wrap="square" lIns="0" tIns="0" rIns="0" bIns="0" rtlCol="0" anchor="t"/>
-          <a:lstStyle/>
-          <a:p>
-            <a:pPr algn="l" indent="0" marL="0">
-              <a:lnSpc>
-                <a:spcPts val="1680"/>
-              </a:lnSpc>
-              <a:spcBef>
-                <a:spcPts val="300"/>
-              </a:spcBef>
-              <a:spcAft>
-                <a:spcPts val="300"/>
-              </a:spcAft>
-              <a:buNone/>
-            </a:pPr>
-            <a:r>
-              <a:rPr lang="en-US" sz="1200" dirty="0">
-                <a:solidFill>
-                  <a:srgbClr val="1A1A1A"/>
-                </a:solidFill>
-                <a:latin typeface="Georgia" pitchFamily="34" charset="0"/>
-                <a:ea typeface="Georgia" pitchFamily="34" charset="-122"/>
-                <a:cs typeface="Georgia" pitchFamily="34" charset="-120"/>
-              </a:rPr>
-              <a:t>Students perform 2 rounds of Sūrya Namaskāra with breath co-ordination AND learn the surprising historical fact that the modern sequence is early-20th-century.</a:t>
-            </a:r>
-            <a:endParaRPr lang="en-US" sz="1200" dirty="0"/>
-          </a:p>
-        </p:txBody>
-      </p:sp>
-      <p:sp>
-        <p:nvSpPr>
-          <p:cNvPr id="7" name="Text 5"/>
-          <p:cNvSpPr/>
-          <p:nvPr/>
-        </p:nvSpPr>
-        <p:spPr>
-          <a:xfrm>
             <a:off x="406301" y="4434929"/>
             <a:ext cx="8498026" cy="213271"/>
           </a:xfrm>
@@ -2205,7 +2376,7 @@
                 <a:ea typeface="Times New Roman" pitchFamily="34" charset="-122"/>
                 <a:cs typeface="Times New Roman" pitchFamily="34" charset="-120"/>
               </a:rPr>
-              <a:t>Teacher notes</a:t>
+              <a:t>Discussion (8 min)</a:t>
             </a:r>
             <a:endParaRPr lang="en-US" sz="1800" dirty="0"/>
           </a:p>
@@ -2219,8 +2390,8 @@
         </p:nvSpPr>
         <p:spPr>
           <a:xfrm>
-            <a:off x="406301" y="870942"/>
-            <a:ext cx="8498026" cy="426541"/>
+            <a:off x="634901" y="883593"/>
+            <a:ext cx="8102798" cy="525661"/>
           </a:xfrm>
           <a:prstGeom prst="rect">
             <a:avLst/>
@@ -2232,13 +2403,75 @@
           <a:bodyPr wrap="square" lIns="0" tIns="0" rIns="0" bIns="0" rtlCol="0" anchor="t"/>
           <a:lstStyle/>
           <a:p>
+            <a:pPr algn="l" marL="342900" indent="-342900">
+              <a:lnSpc>
+                <a:spcPts val="1620"/>
+              </a:lnSpc>
+              <a:spcAft>
+                <a:spcPts val="300"/>
+              </a:spcAft>
+              <a:buSzPct val="100000"/>
+              <a:buChar char="•"/>
+            </a:pPr>
+            <a:r>
+              <a:rPr lang="en-US" sz="1200" dirty="0">
+                <a:solidFill>
+                  <a:srgbClr val="1A1A1A"/>
+                </a:solidFill>
+                <a:latin typeface="Georgia" pitchFamily="34" charset="0"/>
+                <a:ea typeface="Georgia" pitchFamily="34" charset="-122"/>
+                <a:cs typeface="Georgia" pitchFamily="34" charset="-120"/>
+              </a:rPr>
+              <a:t>Did knowing the modern history change how the practice felt? Why or why not?</a:t>
+            </a:r>
+            <a:endParaRPr lang="en-US" sz="1200" dirty="0"/>
+          </a:p>
+          <a:p>
+            <a:pPr algn="l" marL="342900" indent="-342900">
+              <a:lnSpc>
+                <a:spcPts val="1620"/>
+              </a:lnSpc>
+              <a:spcAft>
+                <a:spcPts val="300"/>
+              </a:spcAft>
+              <a:buSzPct val="100000"/>
+              <a:buChar char="•"/>
+            </a:pPr>
+            <a:r>
+              <a:rPr lang="en-US" sz="1200" dirty="0">
+                <a:solidFill>
+                  <a:srgbClr val="1A1A1A"/>
+                </a:solidFill>
+                <a:latin typeface="Georgia" pitchFamily="34" charset="0"/>
+                <a:ea typeface="Georgia" pitchFamily="34" charset="-122"/>
+                <a:cs typeface="Georgia" pitchFamily="34" charset="-120"/>
+              </a:rPr>
+              <a:t>Patañjali's </a:t>
+            </a:r>
             <a:pPr algn="l" indent="0" marL="0">
               <a:lnSpc>
-                <a:spcPts val="1680"/>
-              </a:lnSpc>
-              <a:spcBef>
-                <a:spcPts val="300"/>
-              </a:spcBef>
+                <a:spcPts val="1620"/>
+              </a:lnSpc>
+              <a:spcAft>
+                <a:spcPts val="300"/>
+              </a:spcAft>
+              <a:buNone/>
+            </a:pPr>
+            <a:r>
+              <a:rPr lang="en-US" sz="1200" i="1" dirty="0">
+                <a:solidFill>
+                  <a:srgbClr val="1A1A1A"/>
+                </a:solidFill>
+                <a:latin typeface="Georgia" pitchFamily="34" charset="0"/>
+                <a:ea typeface="Georgia" pitchFamily="34" charset="-122"/>
+                <a:cs typeface="Georgia" pitchFamily="34" charset="-120"/>
+              </a:rPr>
+              <a:t>sthira-sukham</a:t>
+            </a:r>
+            <a:pPr algn="l" indent="0" marL="0">
+              <a:lnSpc>
+                <a:spcPts val="1620"/>
+              </a:lnSpc>
               <a:spcAft>
                 <a:spcPts val="300"/>
               </a:spcAft>
@@ -2253,53 +2486,7 @@
                 <a:ea typeface="Georgia" pitchFamily="34" charset="-122"/>
                 <a:cs typeface="Georgia" pitchFamily="34" charset="-120"/>
               </a:rPr>
-              <a:t>– The history surprises students. Some find it diminishing; others find it interesting. Both reactions are legitimate. – Inversions in advanced SN variations are </a:t>
-            </a:r>
-            <a:pPr algn="l" indent="0" marL="0">
-              <a:lnSpc>
-                <a:spcPts val="1680"/>
-              </a:lnSpc>
-              <a:spcBef>
-                <a:spcPts val="300"/>
-              </a:spcBef>
-              <a:spcAft>
-                <a:spcPts val="300"/>
-              </a:spcAft>
-              <a:buNone/>
-            </a:pPr>
-            <a:r>
-              <a:rPr lang="en-US" sz="1200" i="1" dirty="0">
-                <a:solidFill>
-                  <a:srgbClr val="1A1A1A"/>
-                </a:solidFill>
-                <a:latin typeface="Georgia" pitchFamily="34" charset="0"/>
-                <a:ea typeface="Georgia" pitchFamily="34" charset="-122"/>
-                <a:cs typeface="Georgia" pitchFamily="34" charset="-120"/>
-              </a:rPr>
-              <a:t>not</a:t>
-            </a:r>
-            <a:pPr algn="l" indent="0" marL="0">
-              <a:lnSpc>
-                <a:spcPts val="1680"/>
-              </a:lnSpc>
-              <a:spcBef>
-                <a:spcPts val="300"/>
-              </a:spcBef>
-              <a:spcAft>
-                <a:spcPts val="300"/>
-              </a:spcAft>
-              <a:buNone/>
-            </a:pPr>
-            <a:r>
-              <a:rPr lang="en-US" sz="1200" dirty="0">
-                <a:solidFill>
-                  <a:srgbClr val="1A1A1A"/>
-                </a:solidFill>
-                <a:latin typeface="Georgia" pitchFamily="34" charset="0"/>
-                <a:ea typeface="Georgia" pitchFamily="34" charset="-122"/>
-                <a:cs typeface="Georgia" pitchFamily="34" charset="-120"/>
-              </a:rPr>
-              <a:t> taught here. Stick to the basic 12-pose sequence.</a:t>
+              <a:t> criterion — does Sūrya Namaskāra meet it?</a:t>
             </a:r>
             <a:endParaRPr lang="en-US" sz="1200" dirty="0"/>
           </a:p>
@@ -2457,7 +2644,7 @@
                 <a:ea typeface="Times New Roman" pitchFamily="34" charset="-122"/>
                 <a:cs typeface="Times New Roman" pitchFamily="34" charset="-120"/>
               </a:rPr>
-              <a:t>Citation(s) used</a:t>
+              <a:t>Wrap-up (4 min)</a:t>
             </a:r>
             <a:endParaRPr lang="en-US" sz="1800" dirty="0"/>
           </a:p>
@@ -2471,7 +2658,73 @@
         </p:nvSpPr>
         <p:spPr>
           <a:xfrm>
-            <a:off x="406301" y="870942"/>
+            <a:off x="634901" y="883593"/>
+            <a:ext cx="8102798" cy="281880"/>
+          </a:xfrm>
+          <a:prstGeom prst="rect">
+            <a:avLst/>
+          </a:prstGeom>
+          <a:noFill/>
+          <a:ln/>
+        </p:spPr>
+        <p:txBody>
+          <a:bodyPr wrap="square" lIns="0" tIns="0" rIns="0" bIns="0" rtlCol="0" anchor="t"/>
+          <a:lstStyle/>
+          <a:p>
+            <a:pPr algn="l" marL="342900" indent="-342900">
+              <a:lnSpc>
+                <a:spcPts val="1620"/>
+              </a:lnSpc>
+              <a:spcAft>
+                <a:spcPts val="300"/>
+              </a:spcAft>
+              <a:buSzPct val="100000"/>
+              <a:buChar char="•"/>
+            </a:pPr>
+            <a:r>
+              <a:rPr lang="en-US" sz="1200" dirty="0">
+                <a:solidFill>
+                  <a:srgbClr val="1A1A1A"/>
+                </a:solidFill>
+                <a:latin typeface="Georgia" pitchFamily="34" charset="0"/>
+                <a:ea typeface="Georgia" pitchFamily="34" charset="-122"/>
+                <a:cs typeface="Georgia" pitchFamily="34" charset="-120"/>
+              </a:rPr>
+              <a:t>Preview Day 5: </a:t>
+            </a:r>
+            <a:pPr algn="l" indent="0" marL="0">
+              <a:lnSpc>
+                <a:spcPts val="1620"/>
+              </a:lnSpc>
+              <a:spcAft>
+                <a:spcPts val="300"/>
+              </a:spcAft>
+              <a:buNone/>
+            </a:pPr>
+            <a:r>
+              <a:rPr lang="en-US" sz="1200" i="1" dirty="0">
+                <a:solidFill>
+                  <a:srgbClr val="1A1A1A"/>
+                </a:solidFill>
+                <a:latin typeface="Georgia" pitchFamily="34" charset="0"/>
+                <a:ea typeface="Georgia" pitchFamily="34" charset="-122"/>
+                <a:cs typeface="Georgia" pitchFamily="34" charset="-120"/>
+              </a:rPr>
+              <a:t>"Tomorrow — primary source reading on prāṇāyāma."</a:t>
+            </a:r>
+            <a:endParaRPr lang="en-US" sz="1200" dirty="0"/>
+          </a:p>
+        </p:txBody>
+      </p:sp>
+      <p:sp>
+        <p:nvSpPr>
+          <p:cNvPr id="5" name="Text 3"/>
+          <p:cNvSpPr/>
+          <p:nvPr/>
+        </p:nvSpPr>
+        <p:spPr>
+          <a:xfrm>
+            <a:off x="406301" y="4434929"/>
             <a:ext cx="8498026" cy="213271"/>
           </a:xfrm>
           <a:prstGeom prst="rect">
@@ -2505,10 +2758,255 @@
                 <a:ea typeface="Georgia" pitchFamily="34" charset="-122"/>
                 <a:cs typeface="Georgia" pitchFamily="34" charset="-120"/>
               </a:rPr>
-              <a:t>– Pant Pratinidhi (1928). </a:t>
-            </a:r>
+              <a:t>Senior ·  · IKS Curriculum</a:t>
+            </a:r>
+            <a:endParaRPr lang="en-US" sz="1200" dirty="0"/>
+          </a:p>
+        </p:txBody>
+      </p:sp>
+    </p:spTree>
+  </p:cSld>
+  <p:clrMapOvr>
+    <a:masterClrMapping/>
+  </p:clrMapOvr>
+</p:sld>
+</file>
+
+<file path=ppt/slides/slide12.xml><?xml version="1.0" encoding="utf-8"?>
+<p:sld xmlns:a="http://schemas.openxmlformats.org/drawingml/2006/main" xmlns:r="http://schemas.openxmlformats.org/officeDocument/2006/relationships" xmlns:p="http://schemas.openxmlformats.org/presentationml/2006/main">
+  <p:cSld name="Slide 12">
+    <p:bg>
+      <p:bgPr>
+        <a:solidFill>
+          <a:srgbClr val="FAF7F2"/>
+        </a:solidFill>
+      </p:bgPr>
+    </p:bg>
+    <p:spTree>
+      <p:nvGrpSpPr>
+        <p:cNvPr id="1" name=""/>
+        <p:cNvGrpSpPr/>
+        <p:nvPr/>
+      </p:nvGrpSpPr>
+      <p:grpSpPr>
+        <a:xfrm>
+          <a:off x="0" y="0"/>
+          <a:ext cx="0" cy="0"/>
+          <a:chOff x="0" y="0"/>
+          <a:chExt cx="0" cy="0"/>
+        </a:xfrm>
+      </p:grpSpPr>
+      <p:sp>
+        <p:nvSpPr>
+          <p:cNvPr id="2" name="Text 0"/>
+          <p:cNvSpPr/>
+          <p:nvPr/>
+        </p:nvSpPr>
+        <p:spPr>
+          <a:xfrm>
+            <a:off x="0" y="0"/>
+            <a:ext cx="9144000" cy="101501"/>
+          </a:xfrm>
+          <a:prstGeom prst="rect">
+            <a:avLst/>
+          </a:prstGeom>
+          <a:solidFill>
+            <a:srgbClr val="5D1D2E"/>
+          </a:solidFill>
+          <a:ln/>
+        </p:spPr>
+        <p:txBody>
+          <a:bodyPr wrap="square" rtlCol="0" anchor="ctr"/>
+          <a:lstStyle/>
+          <a:p>
+            <a:pPr indent="0" marL="0">
+              <a:buNone/>
+            </a:pPr>
+            <a:endParaRPr lang="en-US" dirty="0"/>
+          </a:p>
+        </p:txBody>
+      </p:sp>
+      <p:sp>
+        <p:nvSpPr>
+          <p:cNvPr id="3" name="Text 1"/>
+          <p:cNvSpPr/>
+          <p:nvPr/>
+        </p:nvSpPr>
+        <p:spPr>
+          <a:xfrm>
+            <a:off x="406301" y="457051"/>
+            <a:ext cx="8498026" cy="274290"/>
+          </a:xfrm>
+          <a:prstGeom prst="rect">
+            <a:avLst/>
+          </a:prstGeom>
+          <a:noFill/>
+          <a:ln/>
+        </p:spPr>
+        <p:txBody>
+          <a:bodyPr wrap="square" lIns="0" tIns="0" rIns="0" bIns="0" rtlCol="0" anchor="t"/>
+          <a:lstStyle/>
+          <a:p>
             <a:pPr algn="l" indent="0" marL="0">
               <a:lnSpc>
+                <a:spcPts val="2160"/>
+              </a:lnSpc>
+              <a:spcBef>
+                <a:spcPts val="600"/>
+              </a:spcBef>
+              <a:spcAft>
+                <a:spcPts val="800"/>
+              </a:spcAft>
+              <a:buNone/>
+            </a:pPr>
+            <a:r>
+              <a:rPr lang="en-US" sz="1800" b="1" dirty="0">
+                <a:solidFill>
+                  <a:srgbClr val="997929"/>
+                </a:solidFill>
+                <a:latin typeface="Times New Roman" pitchFamily="34" charset="0"/>
+                <a:ea typeface="Times New Roman" pitchFamily="34" charset="-122"/>
+                <a:cs typeface="Times New Roman" pitchFamily="34" charset="-120"/>
+              </a:rPr>
+              <a:t>Differentiation</a:t>
+            </a:r>
+            <a:endParaRPr lang="en-US" sz="1800" dirty="0"/>
+          </a:p>
+        </p:txBody>
+      </p:sp>
+      <p:sp>
+        <p:nvSpPr>
+          <p:cNvPr id="4" name="Text 2"/>
+          <p:cNvSpPr/>
+          <p:nvPr/>
+        </p:nvSpPr>
+        <p:spPr>
+          <a:xfrm>
+            <a:off x="634901" y="883593"/>
+            <a:ext cx="8102798" cy="525661"/>
+          </a:xfrm>
+          <a:prstGeom prst="rect">
+            <a:avLst/>
+          </a:prstGeom>
+          <a:noFill/>
+          <a:ln/>
+        </p:spPr>
+        <p:txBody>
+          <a:bodyPr wrap="square" lIns="0" tIns="0" rIns="0" bIns="0" rtlCol="0" anchor="t"/>
+          <a:lstStyle/>
+          <a:p>
+            <a:pPr algn="l" marL="342900" indent="-342900">
+              <a:lnSpc>
+                <a:spcPts val="1620"/>
+              </a:lnSpc>
+              <a:spcAft>
+                <a:spcPts val="300"/>
+              </a:spcAft>
+              <a:buSzPct val="100000"/>
+              <a:buChar char="•"/>
+            </a:pPr>
+            <a:r>
+              <a:rPr lang="en-US" sz="1200" b="1" dirty="0">
+                <a:solidFill>
+                  <a:srgbClr val="1A1A1A"/>
+                </a:solidFill>
+                <a:latin typeface="Georgia" pitchFamily="34" charset="0"/>
+                <a:ea typeface="Georgia" pitchFamily="34" charset="-122"/>
+                <a:cs typeface="Georgia" pitchFamily="34" charset="-120"/>
+              </a:rPr>
+              <a:t>Tier up:</a:t>
+            </a:r>
+            <a:pPr algn="l" indent="0" marL="0">
+              <a:lnSpc>
+                <a:spcPts val="1620"/>
+              </a:lnSpc>
+              <a:spcAft>
+                <a:spcPts val="300"/>
+              </a:spcAft>
+              <a:buNone/>
+            </a:pPr>
+            <a:r>
+              <a:rPr lang="en-US" sz="1200" dirty="0">
+                <a:solidFill>
+                  <a:srgbClr val="1A1A1A"/>
+                </a:solidFill>
+                <a:latin typeface="Georgia" pitchFamily="34" charset="0"/>
+                <a:ea typeface="Georgia" pitchFamily="34" charset="-122"/>
+                <a:cs typeface="Georgia" pitchFamily="34" charset="-120"/>
+              </a:rPr>
+              <a:t> Read about the Krishnamacharya lineage (Singleton ch. 8 brief).</a:t>
+            </a:r>
+            <a:endParaRPr lang="en-US" sz="1200" dirty="0"/>
+          </a:p>
+          <a:p>
+            <a:pPr algn="l" marL="342900" indent="-342900">
+              <a:lnSpc>
+                <a:spcPts val="1620"/>
+              </a:lnSpc>
+              <a:spcAft>
+                <a:spcPts val="300"/>
+              </a:spcAft>
+              <a:buSzPct val="100000"/>
+              <a:buChar char="•"/>
+            </a:pPr>
+            <a:r>
+              <a:rPr lang="en-US" sz="1200" b="1" dirty="0">
+                <a:solidFill>
+                  <a:srgbClr val="1A1A1A"/>
+                </a:solidFill>
+                <a:latin typeface="Georgia" pitchFamily="34" charset="0"/>
+                <a:ea typeface="Georgia" pitchFamily="34" charset="-122"/>
+                <a:cs typeface="Georgia" pitchFamily="34" charset="-120"/>
+              </a:rPr>
+              <a:t>Tier down:</a:t>
+            </a:r>
+            <a:pPr algn="l" indent="0" marL="0">
+              <a:lnSpc>
+                <a:spcPts val="1620"/>
+              </a:lnSpc>
+              <a:spcAft>
+                <a:spcPts val="300"/>
+              </a:spcAft>
+              <a:buNone/>
+            </a:pPr>
+            <a:r>
+              <a:rPr lang="en-US" sz="1200" dirty="0">
+                <a:solidFill>
+                  <a:srgbClr val="1A1A1A"/>
+                </a:solidFill>
+                <a:latin typeface="Georgia" pitchFamily="34" charset="0"/>
+                <a:ea typeface="Georgia" pitchFamily="34" charset="-122"/>
+                <a:cs typeface="Georgia" pitchFamily="34" charset="-120"/>
+              </a:rPr>
+              <a:t> 1 round at slower pace; focus on breath co-ordination.</a:t>
+            </a:r>
+            <a:endParaRPr lang="en-US" sz="1200" dirty="0"/>
+          </a:p>
+        </p:txBody>
+      </p:sp>
+      <p:sp>
+        <p:nvSpPr>
+          <p:cNvPr id="5" name="Text 3"/>
+          <p:cNvSpPr/>
+          <p:nvPr/>
+        </p:nvSpPr>
+        <p:spPr>
+          <a:xfrm>
+            <a:off x="406301" y="4434929"/>
+            <a:ext cx="8498026" cy="213271"/>
+          </a:xfrm>
+          <a:prstGeom prst="rect">
+            <a:avLst/>
+          </a:prstGeom>
+          <a:noFill/>
+          <a:ln/>
+        </p:spPr>
+        <p:txBody>
+          <a:bodyPr wrap="square" lIns="0" tIns="0" rIns="0" bIns="0" rtlCol="0" anchor="t"/>
+          <a:lstStyle/>
+          <a:p>
+            <a:pPr algn="l" indent="0" marL="0">
+              <a:lnSpc>
                 <a:spcPts val="1680"/>
               </a:lnSpc>
               <a:spcBef>
@@ -2520,6 +3018,206 @@
               <a:buNone/>
             </a:pPr>
             <a:r>
+              <a:rPr lang="en-US" sz="1200" dirty="0">
+                <a:solidFill>
+                  <a:srgbClr val="1A1A1A"/>
+                </a:solidFill>
+                <a:latin typeface="Georgia" pitchFamily="34" charset="0"/>
+                <a:ea typeface="Georgia" pitchFamily="34" charset="-122"/>
+                <a:cs typeface="Georgia" pitchFamily="34" charset="-120"/>
+              </a:rPr>
+              <a:t>Senior ·  · IKS Curriculum</a:t>
+            </a:r>
+            <a:endParaRPr lang="en-US" sz="1200" dirty="0"/>
+          </a:p>
+        </p:txBody>
+      </p:sp>
+    </p:spTree>
+  </p:cSld>
+  <p:clrMapOvr>
+    <a:masterClrMapping/>
+  </p:clrMapOvr>
+</p:sld>
+</file>
+
+<file path=ppt/slides/slide13.xml><?xml version="1.0" encoding="utf-8"?>
+<p:sld xmlns:a="http://schemas.openxmlformats.org/drawingml/2006/main" xmlns:r="http://schemas.openxmlformats.org/officeDocument/2006/relationships" xmlns:p="http://schemas.openxmlformats.org/presentationml/2006/main">
+  <p:cSld name="Slide 13">
+    <p:bg>
+      <p:bgPr>
+        <a:solidFill>
+          <a:srgbClr val="FAF7F2"/>
+        </a:solidFill>
+      </p:bgPr>
+    </p:bg>
+    <p:spTree>
+      <p:nvGrpSpPr>
+        <p:cNvPr id="1" name=""/>
+        <p:cNvGrpSpPr/>
+        <p:nvPr/>
+      </p:nvGrpSpPr>
+      <p:grpSpPr>
+        <a:xfrm>
+          <a:off x="0" y="0"/>
+          <a:ext cx="0" cy="0"/>
+          <a:chOff x="0" y="0"/>
+          <a:chExt cx="0" cy="0"/>
+        </a:xfrm>
+      </p:grpSpPr>
+      <p:sp>
+        <p:nvSpPr>
+          <p:cNvPr id="2" name="Text 0"/>
+          <p:cNvSpPr/>
+          <p:nvPr/>
+        </p:nvSpPr>
+        <p:spPr>
+          <a:xfrm>
+            <a:off x="0" y="0"/>
+            <a:ext cx="9144000" cy="101501"/>
+          </a:xfrm>
+          <a:prstGeom prst="rect">
+            <a:avLst/>
+          </a:prstGeom>
+          <a:solidFill>
+            <a:srgbClr val="5D1D2E"/>
+          </a:solidFill>
+          <a:ln/>
+        </p:spPr>
+        <p:txBody>
+          <a:bodyPr wrap="square" rtlCol="0" anchor="ctr"/>
+          <a:lstStyle/>
+          <a:p>
+            <a:pPr indent="0" marL="0">
+              <a:buNone/>
+            </a:pPr>
+            <a:endParaRPr lang="en-US" dirty="0"/>
+          </a:p>
+        </p:txBody>
+      </p:sp>
+      <p:sp>
+        <p:nvSpPr>
+          <p:cNvPr id="3" name="Text 1"/>
+          <p:cNvSpPr/>
+          <p:nvPr/>
+        </p:nvSpPr>
+        <p:spPr>
+          <a:xfrm>
+            <a:off x="406301" y="457051"/>
+            <a:ext cx="8498026" cy="274290"/>
+          </a:xfrm>
+          <a:prstGeom prst="rect">
+            <a:avLst/>
+          </a:prstGeom>
+          <a:noFill/>
+          <a:ln/>
+        </p:spPr>
+        <p:txBody>
+          <a:bodyPr wrap="square" lIns="0" tIns="0" rIns="0" bIns="0" rtlCol="0" anchor="t"/>
+          <a:lstStyle/>
+          <a:p>
+            <a:pPr algn="l" indent="0" marL="0">
+              <a:lnSpc>
+                <a:spcPts val="2160"/>
+              </a:lnSpc>
+              <a:spcBef>
+                <a:spcPts val="600"/>
+              </a:spcBef>
+              <a:spcAft>
+                <a:spcPts val="800"/>
+              </a:spcAft>
+              <a:buNone/>
+            </a:pPr>
+            <a:r>
+              <a:rPr lang="en-US" sz="1800" b="1" dirty="0">
+                <a:solidFill>
+                  <a:srgbClr val="997929"/>
+                </a:solidFill>
+                <a:latin typeface="Times New Roman" pitchFamily="34" charset="0"/>
+                <a:ea typeface="Times New Roman" pitchFamily="34" charset="-122"/>
+                <a:cs typeface="Times New Roman" pitchFamily="34" charset="-120"/>
+              </a:rPr>
+              <a:t>Teacher notes</a:t>
+            </a:r>
+            <a:endParaRPr lang="en-US" sz="1800" dirty="0"/>
+          </a:p>
+        </p:txBody>
+      </p:sp>
+      <p:sp>
+        <p:nvSpPr>
+          <p:cNvPr id="4" name="Text 2"/>
+          <p:cNvSpPr/>
+          <p:nvPr/>
+        </p:nvSpPr>
+        <p:spPr>
+          <a:xfrm>
+            <a:off x="634901" y="883593"/>
+            <a:ext cx="8102798" cy="525661"/>
+          </a:xfrm>
+          <a:prstGeom prst="rect">
+            <a:avLst/>
+          </a:prstGeom>
+          <a:noFill/>
+          <a:ln/>
+        </p:spPr>
+        <p:txBody>
+          <a:bodyPr wrap="square" lIns="0" tIns="0" rIns="0" bIns="0" rtlCol="0" anchor="t"/>
+          <a:lstStyle/>
+          <a:p>
+            <a:pPr algn="l" marL="342900" indent="-342900">
+              <a:lnSpc>
+                <a:spcPts val="1620"/>
+              </a:lnSpc>
+              <a:spcAft>
+                <a:spcPts val="300"/>
+              </a:spcAft>
+              <a:buSzPct val="100000"/>
+              <a:buChar char="•"/>
+            </a:pPr>
+            <a:r>
+              <a:rPr lang="en-US" sz="1200" dirty="0">
+                <a:solidFill>
+                  <a:srgbClr val="1A1A1A"/>
+                </a:solidFill>
+                <a:latin typeface="Georgia" pitchFamily="34" charset="0"/>
+                <a:ea typeface="Georgia" pitchFamily="34" charset="-122"/>
+                <a:cs typeface="Georgia" pitchFamily="34" charset="-120"/>
+              </a:rPr>
+              <a:t>The history surprises students. Some find it diminishing; others find it interesting. Both reactions are legitimate.</a:t>
+            </a:r>
+            <a:endParaRPr lang="en-US" sz="1200" dirty="0"/>
+          </a:p>
+          <a:p>
+            <a:pPr algn="l" marL="342900" indent="-342900">
+              <a:lnSpc>
+                <a:spcPts val="1620"/>
+              </a:lnSpc>
+              <a:spcAft>
+                <a:spcPts val="300"/>
+              </a:spcAft>
+              <a:buSzPct val="100000"/>
+              <a:buChar char="•"/>
+            </a:pPr>
+            <a:r>
+              <a:rPr lang="en-US" sz="1200" dirty="0">
+                <a:solidFill>
+                  <a:srgbClr val="1A1A1A"/>
+                </a:solidFill>
+                <a:latin typeface="Georgia" pitchFamily="34" charset="0"/>
+                <a:ea typeface="Georgia" pitchFamily="34" charset="-122"/>
+                <a:cs typeface="Georgia" pitchFamily="34" charset="-120"/>
+              </a:rPr>
+              <a:t>Inversions in advanced SN variations are </a:t>
+            </a:r>
+            <a:pPr algn="l" indent="0" marL="0">
+              <a:lnSpc>
+                <a:spcPts val="1620"/>
+              </a:lnSpc>
+              <a:spcAft>
+                <a:spcPts val="300"/>
+              </a:spcAft>
+              <a:buNone/>
+            </a:pPr>
+            <a:r>
               <a:rPr lang="en-US" sz="1200" i="1" dirty="0">
                 <a:solidFill>
                   <a:srgbClr val="1A1A1A"/>
@@ -2528,61 +3226,300 @@
                 <a:ea typeface="Georgia" pitchFamily="34" charset="-122"/>
                 <a:cs typeface="Georgia" pitchFamily="34" charset="-120"/>
               </a:rPr>
+              <a:t>not</a:t>
+            </a:r>
+            <a:pPr algn="l" indent="0" marL="0">
+              <a:lnSpc>
+                <a:spcPts val="1620"/>
+              </a:lnSpc>
+              <a:spcAft>
+                <a:spcPts val="300"/>
+              </a:spcAft>
+              <a:buNone/>
+            </a:pPr>
+            <a:r>
+              <a:rPr lang="en-US" sz="1200" dirty="0">
+                <a:solidFill>
+                  <a:srgbClr val="1A1A1A"/>
+                </a:solidFill>
+                <a:latin typeface="Georgia" pitchFamily="34" charset="0"/>
+                <a:ea typeface="Georgia" pitchFamily="34" charset="-122"/>
+                <a:cs typeface="Georgia" pitchFamily="34" charset="-120"/>
+              </a:rPr>
+              <a:t> taught here. Stick to the basic 12-pose sequence.</a:t>
+            </a:r>
+            <a:endParaRPr lang="en-US" sz="1200" dirty="0"/>
+          </a:p>
+        </p:txBody>
+      </p:sp>
+      <p:sp>
+        <p:nvSpPr>
+          <p:cNvPr id="5" name="Text 3"/>
+          <p:cNvSpPr/>
+          <p:nvPr/>
+        </p:nvSpPr>
+        <p:spPr>
+          <a:xfrm>
+            <a:off x="406301" y="4434929"/>
+            <a:ext cx="8498026" cy="213271"/>
+          </a:xfrm>
+          <a:prstGeom prst="rect">
+            <a:avLst/>
+          </a:prstGeom>
+          <a:noFill/>
+          <a:ln/>
+        </p:spPr>
+        <p:txBody>
+          <a:bodyPr wrap="square" lIns="0" tIns="0" rIns="0" bIns="0" rtlCol="0" anchor="t"/>
+          <a:lstStyle/>
+          <a:p>
+            <a:pPr algn="l" indent="0" marL="0">
+              <a:lnSpc>
+                <a:spcPts val="1680"/>
+              </a:lnSpc>
+              <a:spcBef>
+                <a:spcPts val="300"/>
+              </a:spcBef>
+              <a:spcAft>
+                <a:spcPts val="300"/>
+              </a:spcAft>
+              <a:buNone/>
+            </a:pPr>
+            <a:r>
+              <a:rPr lang="en-US" sz="1200" dirty="0">
+                <a:solidFill>
+                  <a:srgbClr val="1A1A1A"/>
+                </a:solidFill>
+                <a:latin typeface="Georgia" pitchFamily="34" charset="0"/>
+                <a:ea typeface="Georgia" pitchFamily="34" charset="-122"/>
+                <a:cs typeface="Georgia" pitchFamily="34" charset="-120"/>
+              </a:rPr>
+              <a:t>Senior ·  · IKS Curriculum</a:t>
+            </a:r>
+            <a:endParaRPr lang="en-US" sz="1200" dirty="0"/>
+          </a:p>
+        </p:txBody>
+      </p:sp>
+    </p:spTree>
+  </p:cSld>
+  <p:clrMapOvr>
+    <a:masterClrMapping/>
+  </p:clrMapOvr>
+</p:sld>
+</file>
+
+<file path=ppt/slides/slide14.xml><?xml version="1.0" encoding="utf-8"?>
+<p:sld xmlns:a="http://schemas.openxmlformats.org/drawingml/2006/main" xmlns:r="http://schemas.openxmlformats.org/officeDocument/2006/relationships" xmlns:p="http://schemas.openxmlformats.org/presentationml/2006/main">
+  <p:cSld name="Slide 14">
+    <p:bg>
+      <p:bgPr>
+        <a:solidFill>
+          <a:srgbClr val="FAF7F2"/>
+        </a:solidFill>
+      </p:bgPr>
+    </p:bg>
+    <p:spTree>
+      <p:nvGrpSpPr>
+        <p:cNvPr id="1" name=""/>
+        <p:cNvGrpSpPr/>
+        <p:nvPr/>
+      </p:nvGrpSpPr>
+      <p:grpSpPr>
+        <a:xfrm>
+          <a:off x="0" y="0"/>
+          <a:ext cx="0" cy="0"/>
+          <a:chOff x="0" y="0"/>
+          <a:chExt cx="0" cy="0"/>
+        </a:xfrm>
+      </p:grpSpPr>
+      <p:sp>
+        <p:nvSpPr>
+          <p:cNvPr id="2" name="Text 0"/>
+          <p:cNvSpPr/>
+          <p:nvPr/>
+        </p:nvSpPr>
+        <p:spPr>
+          <a:xfrm>
+            <a:off x="0" y="0"/>
+            <a:ext cx="9144000" cy="101501"/>
+          </a:xfrm>
+          <a:prstGeom prst="rect">
+            <a:avLst/>
+          </a:prstGeom>
+          <a:solidFill>
+            <a:srgbClr val="5D1D2E"/>
+          </a:solidFill>
+          <a:ln/>
+        </p:spPr>
+        <p:txBody>
+          <a:bodyPr wrap="square" rtlCol="0" anchor="ctr"/>
+          <a:lstStyle/>
+          <a:p>
+            <a:pPr indent="0" marL="0">
+              <a:buNone/>
+            </a:pPr>
+            <a:endParaRPr lang="en-US" dirty="0"/>
+          </a:p>
+        </p:txBody>
+      </p:sp>
+      <p:sp>
+        <p:nvSpPr>
+          <p:cNvPr id="3" name="Text 1"/>
+          <p:cNvSpPr/>
+          <p:nvPr/>
+        </p:nvSpPr>
+        <p:spPr>
+          <a:xfrm>
+            <a:off x="406301" y="457051"/>
+            <a:ext cx="8498026" cy="274290"/>
+          </a:xfrm>
+          <a:prstGeom prst="rect">
+            <a:avLst/>
+          </a:prstGeom>
+          <a:noFill/>
+          <a:ln/>
+        </p:spPr>
+        <p:txBody>
+          <a:bodyPr wrap="square" lIns="0" tIns="0" rIns="0" bIns="0" rtlCol="0" anchor="t"/>
+          <a:lstStyle/>
+          <a:p>
+            <a:pPr algn="l" indent="0" marL="0">
+              <a:lnSpc>
+                <a:spcPts val="2160"/>
+              </a:lnSpc>
+              <a:spcBef>
+                <a:spcPts val="600"/>
+              </a:spcBef>
+              <a:spcAft>
+                <a:spcPts val="800"/>
+              </a:spcAft>
+              <a:buNone/>
+            </a:pPr>
+            <a:r>
+              <a:rPr lang="en-US" sz="1800" b="1" dirty="0">
+                <a:solidFill>
+                  <a:srgbClr val="997929"/>
+                </a:solidFill>
+                <a:latin typeface="Times New Roman" pitchFamily="34" charset="0"/>
+                <a:ea typeface="Times New Roman" pitchFamily="34" charset="-122"/>
+                <a:cs typeface="Times New Roman" pitchFamily="34" charset="-120"/>
+              </a:rPr>
+              <a:t>Citation(s) used</a:t>
+            </a:r>
+            <a:endParaRPr lang="en-US" sz="1800" dirty="0"/>
+          </a:p>
+        </p:txBody>
+      </p:sp>
+      <p:sp>
+        <p:nvSpPr>
+          <p:cNvPr id="4" name="Text 2"/>
+          <p:cNvSpPr/>
+          <p:nvPr/>
+        </p:nvSpPr>
+        <p:spPr>
+          <a:xfrm>
+            <a:off x="634901" y="883593"/>
+            <a:ext cx="8102798" cy="525661"/>
+          </a:xfrm>
+          <a:prstGeom prst="rect">
+            <a:avLst/>
+          </a:prstGeom>
+          <a:noFill/>
+          <a:ln/>
+        </p:spPr>
+        <p:txBody>
+          <a:bodyPr wrap="square" lIns="0" tIns="0" rIns="0" bIns="0" rtlCol="0" anchor="t"/>
+          <a:lstStyle/>
+          <a:p>
+            <a:pPr algn="l" marL="342900" indent="-342900">
+              <a:lnSpc>
+                <a:spcPts val="1620"/>
+              </a:lnSpc>
+              <a:spcAft>
+                <a:spcPts val="300"/>
+              </a:spcAft>
+              <a:buSzPct val="100000"/>
+              <a:buChar char="•"/>
+            </a:pPr>
+            <a:r>
+              <a:rPr lang="en-US" sz="1200" dirty="0">
+                <a:solidFill>
+                  <a:srgbClr val="1A1A1A"/>
+                </a:solidFill>
+                <a:latin typeface="Georgia" pitchFamily="34" charset="0"/>
+                <a:ea typeface="Georgia" pitchFamily="34" charset="-122"/>
+                <a:cs typeface="Georgia" pitchFamily="34" charset="-120"/>
+              </a:rPr>
+              <a:t>Pant Pratinidhi (1928). </a:t>
+            </a:r>
+            <a:pPr algn="l" indent="0" marL="0">
+              <a:lnSpc>
+                <a:spcPts val="1620"/>
+              </a:lnSpc>
+              <a:spcAft>
+                <a:spcPts val="300"/>
+              </a:spcAft>
+              <a:buNone/>
+            </a:pPr>
+            <a:r>
+              <a:rPr lang="en-US" sz="1200" i="1" dirty="0">
+                <a:solidFill>
+                  <a:srgbClr val="1A1A1A"/>
+                </a:solidFill>
+                <a:latin typeface="Georgia" pitchFamily="34" charset="0"/>
+                <a:ea typeface="Georgia" pitchFamily="34" charset="-122"/>
+                <a:cs typeface="Georgia" pitchFamily="34" charset="-120"/>
+              </a:rPr>
               <a:t>The Ten-Point Way to Health.</a:t>
             </a:r>
+            <a:endParaRPr lang="en-US" sz="1200" dirty="0"/>
+          </a:p>
+          <a:p>
+            <a:pPr algn="l" marL="342900" indent="-342900">
+              <a:lnSpc>
+                <a:spcPts val="1620"/>
+              </a:lnSpc>
+              <a:spcAft>
+                <a:spcPts val="300"/>
+              </a:spcAft>
+              <a:buSzPct val="100000"/>
+              <a:buChar char="•"/>
+            </a:pPr>
+            <a:r>
+              <a:rPr lang="en-US" sz="1200" dirty="0">
+                <a:solidFill>
+                  <a:srgbClr val="1A1A1A"/>
+                </a:solidFill>
+                <a:latin typeface="Georgia" pitchFamily="34" charset="0"/>
+                <a:ea typeface="Georgia" pitchFamily="34" charset="-122"/>
+                <a:cs typeface="Georgia" pitchFamily="34" charset="-120"/>
+              </a:rPr>
+              <a:t>Singleton (2010). </a:t>
+            </a:r>
             <a:pPr algn="l" indent="0" marL="0">
               <a:lnSpc>
-                <a:spcPts val="1680"/>
-              </a:lnSpc>
-              <a:spcBef>
-                <a:spcPts val="300"/>
-              </a:spcBef>
-              <a:spcAft>
-                <a:spcPts val="300"/>
-              </a:spcAft>
-              <a:buNone/>
-            </a:pPr>
-            <a:r>
-              <a:rPr lang="en-US" sz="1200" dirty="0">
-                <a:solidFill>
-                  <a:srgbClr val="1A1A1A"/>
-                </a:solidFill>
-                <a:latin typeface="Georgia" pitchFamily="34" charset="0"/>
-                <a:ea typeface="Georgia" pitchFamily="34" charset="-122"/>
-                <a:cs typeface="Georgia" pitchFamily="34" charset="-120"/>
-              </a:rPr>
-              <a:t> – Singleton (2010). </a:t>
+                <a:spcPts val="1620"/>
+              </a:lnSpc>
+              <a:spcAft>
+                <a:spcPts val="300"/>
+              </a:spcAft>
+              <a:buNone/>
+            </a:pPr>
+            <a:r>
+              <a:rPr lang="en-US" sz="1200" i="1" dirty="0">
+                <a:solidFill>
+                  <a:srgbClr val="1A1A1A"/>
+                </a:solidFill>
+                <a:latin typeface="Georgia" pitchFamily="34" charset="0"/>
+                <a:ea typeface="Georgia" pitchFamily="34" charset="-122"/>
+                <a:cs typeface="Georgia" pitchFamily="34" charset="-120"/>
+              </a:rPr>
+              <a:t>Yoga Body</a:t>
             </a:r>
             <a:pPr algn="l" indent="0" marL="0">
               <a:lnSpc>
-                <a:spcPts val="1680"/>
-              </a:lnSpc>
-              <a:spcBef>
-                <a:spcPts val="300"/>
-              </a:spcBef>
-              <a:spcAft>
-                <a:spcPts val="300"/>
-              </a:spcAft>
-              <a:buNone/>
-            </a:pPr>
-            <a:r>
-              <a:rPr lang="en-US" sz="1200" i="1" dirty="0">
-                <a:solidFill>
-                  <a:srgbClr val="1A1A1A"/>
-                </a:solidFill>
-                <a:latin typeface="Georgia" pitchFamily="34" charset="0"/>
-                <a:ea typeface="Georgia" pitchFamily="34" charset="-122"/>
-                <a:cs typeface="Georgia" pitchFamily="34" charset="-120"/>
-              </a:rPr>
-              <a:t>Yoga Body</a:t>
-            </a:r>
-            <a:pPr algn="l" indent="0" marL="0">
-              <a:lnSpc>
-                <a:spcPts val="1680"/>
-              </a:lnSpc>
-              <a:spcBef>
-                <a:spcPts val="300"/>
-              </a:spcBef>
+                <a:spcPts val="1620"/>
+              </a:lnSpc>
               <a:spcAft>
                 <a:spcPts val="300"/>
               </a:spcAft>
@@ -2755,7 +3692,7 @@
                 <a:ea typeface="Times New Roman" pitchFamily="34" charset="-122"/>
                 <a:cs typeface="Times New Roman" pitchFamily="34" charset="-120"/>
               </a:rPr>
-              <a:t>Materials</a:t>
+              <a:t>Learning objective</a:t>
             </a:r>
             <a:endParaRPr lang="en-US" sz="1800" dirty="0"/>
           </a:p>
@@ -2770,7 +3707,7 @@
         <p:spPr>
           <a:xfrm>
             <a:off x="406301" y="870942"/>
-            <a:ext cx="8498026" cy="213271"/>
+            <a:ext cx="8498026" cy="426541"/>
           </a:xfrm>
           <a:prstGeom prst="rect">
             <a:avLst/>
@@ -2803,7 +3740,7 @@
                 <a:ea typeface="Georgia" pitchFamily="34" charset="-122"/>
                 <a:cs typeface="Georgia" pitchFamily="34" charset="-120"/>
               </a:rPr>
-              <a:t>– Mats – Wall poster of 12 SN poses – Brief printed handout on SN history (teacher synopsis, 1 page)</a:t>
+              <a:t>Students perform 2 rounds of Sūrya Namaskāra with breath co-ordination AND learn the surprising historical fact that the modern sequence is early-20th-century.</a:t>
             </a:r>
             <a:endParaRPr lang="en-US" sz="1200" dirty="0"/>
           </a:p>
@@ -2961,7 +3898,7 @@
                 <a:ea typeface="Times New Roman" pitchFamily="34" charset="-122"/>
                 <a:cs typeface="Times New Roman" pitchFamily="34" charset="-120"/>
               </a:rPr>
-              <a:t>Flow</a:t>
+              <a:t>Materials</a:t>
             </a:r>
             <a:endParaRPr lang="en-US" sz="1800" dirty="0"/>
           </a:p>
@@ -2970,6 +3907,100 @@
       <p:sp>
         <p:nvSpPr>
           <p:cNvPr id="4" name="Text 2"/>
+          <p:cNvSpPr/>
+          <p:nvPr/>
+        </p:nvSpPr>
+        <p:spPr>
+          <a:xfrm>
+            <a:off x="634901" y="883593"/>
+            <a:ext cx="8102798" cy="769441"/>
+          </a:xfrm>
+          <a:prstGeom prst="rect">
+            <a:avLst/>
+          </a:prstGeom>
+          <a:noFill/>
+          <a:ln/>
+        </p:spPr>
+        <p:txBody>
+          <a:bodyPr wrap="square" lIns="0" tIns="0" rIns="0" bIns="0" rtlCol="0" anchor="t"/>
+          <a:lstStyle/>
+          <a:p>
+            <a:pPr algn="l" marL="342900" indent="-342900">
+              <a:lnSpc>
+                <a:spcPts val="1620"/>
+              </a:lnSpc>
+              <a:spcAft>
+                <a:spcPts val="300"/>
+              </a:spcAft>
+              <a:buSzPct val="100000"/>
+              <a:buChar char="•"/>
+            </a:pPr>
+            <a:r>
+              <a:rPr lang="en-US" sz="1200" dirty="0">
+                <a:solidFill>
+                  <a:srgbClr val="1A1A1A"/>
+                </a:solidFill>
+                <a:latin typeface="Georgia" pitchFamily="34" charset="0"/>
+                <a:ea typeface="Georgia" pitchFamily="34" charset="-122"/>
+                <a:cs typeface="Georgia" pitchFamily="34" charset="-120"/>
+              </a:rPr>
+              <a:t>Mats</a:t>
+            </a:r>
+            <a:endParaRPr lang="en-US" sz="1200" dirty="0"/>
+          </a:p>
+          <a:p>
+            <a:pPr algn="l" marL="342900" indent="-342900">
+              <a:lnSpc>
+                <a:spcPts val="1620"/>
+              </a:lnSpc>
+              <a:spcAft>
+                <a:spcPts val="300"/>
+              </a:spcAft>
+              <a:buSzPct val="100000"/>
+              <a:buChar char="•"/>
+            </a:pPr>
+            <a:r>
+              <a:rPr lang="en-US" sz="1200" dirty="0">
+                <a:solidFill>
+                  <a:srgbClr val="1A1A1A"/>
+                </a:solidFill>
+                <a:latin typeface="Georgia" pitchFamily="34" charset="0"/>
+                <a:ea typeface="Georgia" pitchFamily="34" charset="-122"/>
+                <a:cs typeface="Georgia" pitchFamily="34" charset="-120"/>
+              </a:rPr>
+              <a:t>Wall poster of 12 SN poses</a:t>
+            </a:r>
+            <a:endParaRPr lang="en-US" sz="1200" dirty="0"/>
+          </a:p>
+          <a:p>
+            <a:pPr algn="l" marL="342900" indent="-342900">
+              <a:lnSpc>
+                <a:spcPts val="1620"/>
+              </a:lnSpc>
+              <a:spcAft>
+                <a:spcPts val="300"/>
+              </a:spcAft>
+              <a:buSzPct val="100000"/>
+              <a:buChar char="•"/>
+            </a:pPr>
+            <a:r>
+              <a:rPr lang="en-US" sz="1200" dirty="0">
+                <a:solidFill>
+                  <a:srgbClr val="1A1A1A"/>
+                </a:solidFill>
+                <a:latin typeface="Georgia" pitchFamily="34" charset="0"/>
+                <a:ea typeface="Georgia" pitchFamily="34" charset="-122"/>
+                <a:cs typeface="Georgia" pitchFamily="34" charset="-120"/>
+              </a:rPr>
+              <a:t>Brief printed handout on SN history (teacher synopsis, 1 page)</a:t>
+            </a:r>
+            <a:endParaRPr lang="en-US" sz="1200" dirty="0"/>
+          </a:p>
+        </p:txBody>
+      </p:sp>
+      <p:sp>
+        <p:nvSpPr>
+          <p:cNvPr id="5" name="Text 3"/>
           <p:cNvSpPr/>
           <p:nvPr/>
         </p:nvSpPr>
@@ -3119,7 +4150,7 @@
                 <a:ea typeface="Times New Roman" pitchFamily="34" charset="-122"/>
                 <a:cs typeface="Times New Roman" pitchFamily="34" charset="-120"/>
               </a:rPr>
-              <a:t>Settle (3 min)</a:t>
+              <a:t>Flow</a:t>
             </a:r>
             <a:endParaRPr lang="en-US" sz="1800" dirty="0"/>
           </a:p>
@@ -3277,7 +4308,7 @@
                 <a:ea typeface="Times New Roman" pitchFamily="34" charset="-122"/>
                 <a:cs typeface="Times New Roman" pitchFamily="34" charset="-120"/>
               </a:rPr>
-              <a:t>Core (10 min) — The history</a:t>
+              <a:t>Settle (3 min)</a:t>
             </a:r>
             <a:endParaRPr lang="en-US" sz="1800" dirty="0"/>
           </a:p>
@@ -3286,146 +4317,6 @@
       <p:sp>
         <p:nvSpPr>
           <p:cNvPr id="4" name="Text 2"/>
-          <p:cNvSpPr/>
-          <p:nvPr/>
-        </p:nvSpPr>
-        <p:spPr>
-          <a:xfrm>
-            <a:off x="406301" y="870942"/>
-            <a:ext cx="8498026" cy="853083"/>
-          </a:xfrm>
-          <a:prstGeom prst="rect">
-            <a:avLst/>
-          </a:prstGeom>
-          <a:noFill/>
-          <a:ln/>
-        </p:spPr>
-        <p:txBody>
-          <a:bodyPr wrap="square" lIns="0" tIns="0" rIns="0" bIns="0" rtlCol="0" anchor="t"/>
-          <a:lstStyle/>
-          <a:p>
-            <a:pPr algn="l" indent="0" marL="0">
-              <a:lnSpc>
-                <a:spcPts val="1680"/>
-              </a:lnSpc>
-              <a:spcBef>
-                <a:spcPts val="300"/>
-              </a:spcBef>
-              <a:spcAft>
-                <a:spcPts val="300"/>
-              </a:spcAft>
-              <a:buNone/>
-            </a:pPr>
-            <a:r>
-              <a:rPr lang="en-US" sz="1200" dirty="0">
-                <a:solidFill>
-                  <a:srgbClr val="1A1A1A"/>
-                </a:solidFill>
-                <a:latin typeface="Georgia" pitchFamily="34" charset="0"/>
-                <a:ea typeface="Georgia" pitchFamily="34" charset="-122"/>
-                <a:cs typeface="Georgia" pitchFamily="34" charset="-120"/>
-              </a:rPr>
-              <a:t>– Sūrya Namaskāra in its modern 12-pose form was codified by the Raja of Aundh (Bhawanrao Shrinivasrao Pant Pratinidhi) in the early 20th century. He published </a:t>
-            </a:r>
-            <a:pPr algn="l" indent="0" marL="0">
-              <a:lnSpc>
-                <a:spcPts val="1680"/>
-              </a:lnSpc>
-              <a:spcBef>
-                <a:spcPts val="300"/>
-              </a:spcBef>
-              <a:spcAft>
-                <a:spcPts val="300"/>
-              </a:spcAft>
-              <a:buNone/>
-            </a:pPr>
-            <a:r>
-              <a:rPr lang="en-US" sz="1200" i="1" dirty="0">
-                <a:solidFill>
-                  <a:srgbClr val="1A1A1A"/>
-                </a:solidFill>
-                <a:latin typeface="Georgia" pitchFamily="34" charset="0"/>
-                <a:ea typeface="Georgia" pitchFamily="34" charset="-122"/>
-                <a:cs typeface="Georgia" pitchFamily="34" charset="-120"/>
-              </a:rPr>
-              <a:t>The Ten-Point Way to Health</a:t>
-            </a:r>
-            <a:pPr algn="l" indent="0" marL="0">
-              <a:lnSpc>
-                <a:spcPts val="1680"/>
-              </a:lnSpc>
-              <a:spcBef>
-                <a:spcPts val="300"/>
-              </a:spcBef>
-              <a:spcAft>
-                <a:spcPts val="300"/>
-              </a:spcAft>
-              <a:buNone/>
-            </a:pPr>
-            <a:r>
-              <a:rPr lang="en-US" sz="1200" dirty="0">
-                <a:solidFill>
-                  <a:srgbClr val="1A1A1A"/>
-                </a:solidFill>
-                <a:latin typeface="Georgia" pitchFamily="34" charset="0"/>
-                <a:ea typeface="Georgia" pitchFamily="34" charset="-122"/>
-                <a:cs typeface="Georgia" pitchFamily="34" charset="-120"/>
-              </a:rPr>
-              <a:t> in 1928, popularising the sequence. – The individual āsanas have older roots. The sequence does not. – This is one of many examples where modern postural yoga has a 20th-century pedigree, even when the Sanskrit names sound ancient.</a:t>
-            </a:r>
-            <a:endParaRPr lang="en-US" sz="1200" dirty="0"/>
-          </a:p>
-        </p:txBody>
-      </p:sp>
-      <p:sp>
-        <p:nvSpPr>
-          <p:cNvPr id="5" name="Text 3"/>
-          <p:cNvSpPr/>
-          <p:nvPr/>
-        </p:nvSpPr>
-        <p:spPr>
-          <a:xfrm>
-            <a:off x="634901" y="1812875"/>
-            <a:ext cx="8102798" cy="281880"/>
-          </a:xfrm>
-          <a:prstGeom prst="rect">
-            <a:avLst/>
-          </a:prstGeom>
-          <a:noFill/>
-          <a:ln/>
-        </p:spPr>
-        <p:txBody>
-          <a:bodyPr wrap="square" lIns="0" tIns="0" rIns="0" bIns="0" rtlCol="0" anchor="t"/>
-          <a:lstStyle/>
-          <a:p>
-            <a:pPr algn="l" marL="342900" indent="-342900">
-              <a:lnSpc>
-                <a:spcPts val="1620"/>
-              </a:lnSpc>
-              <a:spcAft>
-                <a:spcPts val="300"/>
-              </a:spcAft>
-              <a:buSzPct val="100000"/>
-              <a:buChar char="•"/>
-            </a:pPr>
-            <a:r>
-              <a:rPr lang="en-US" sz="1200" dirty="0">
-                <a:solidFill>
-                  <a:srgbClr val="1A1A1A"/>
-                </a:solidFill>
-                <a:latin typeface="Georgia" pitchFamily="34" charset="0"/>
-                <a:ea typeface="Georgia" pitchFamily="34" charset="-122"/>
-                <a:cs typeface="Georgia" pitchFamily="34" charset="-120"/>
-              </a:rPr>
-              <a:t>(We return to this on Day 7.)</a:t>
-            </a:r>
-            <a:endParaRPr lang="en-US" sz="1200" dirty="0"/>
-          </a:p>
-        </p:txBody>
-      </p:sp>
-      <p:sp>
-        <p:nvSpPr>
-          <p:cNvPr id="6" name="Text 4"/>
           <p:cNvSpPr/>
           <p:nvPr/>
         </p:nvSpPr>
@@ -3575,7 +4466,7 @@
                 <a:ea typeface="Times New Roman" pitchFamily="34" charset="-122"/>
                 <a:cs typeface="Times New Roman" pitchFamily="34" charset="-120"/>
               </a:rPr>
-              <a:t>Practice (20 min) — 2 rounds with breath</a:t>
+              <a:t>Core (10 min) — The history</a:t>
             </a:r>
             <a:endParaRPr lang="en-US" sz="1800" dirty="0"/>
           </a:p>
@@ -3589,8 +4480,8 @@
         </p:nvSpPr>
         <p:spPr>
           <a:xfrm>
-            <a:off x="406301" y="870942"/>
-            <a:ext cx="8498026" cy="213271"/>
+            <a:off x="634901" y="883593"/>
+            <a:ext cx="8102798" cy="1424583"/>
           </a:xfrm>
           <a:prstGeom prst="rect">
             <a:avLst/>
@@ -3602,13 +4493,31 @@
           <a:bodyPr wrap="square" lIns="0" tIns="0" rIns="0" bIns="0" rtlCol="0" anchor="t"/>
           <a:lstStyle/>
           <a:p>
+            <a:pPr algn="l" marL="342900" indent="-342900">
+              <a:lnSpc>
+                <a:spcPts val="1620"/>
+              </a:lnSpc>
+              <a:spcAft>
+                <a:spcPts val="300"/>
+              </a:spcAft>
+              <a:buSzPct val="100000"/>
+              <a:buChar char="•"/>
+            </a:pPr>
+            <a:r>
+              <a:rPr lang="en-US" sz="1200" dirty="0">
+                <a:solidFill>
+                  <a:srgbClr val="1A1A1A"/>
+                </a:solidFill>
+                <a:latin typeface="Georgia" pitchFamily="34" charset="0"/>
+                <a:ea typeface="Georgia" pitchFamily="34" charset="-122"/>
+                <a:cs typeface="Georgia" pitchFamily="34" charset="-120"/>
+              </a:rPr>
+              <a:t>Sūrya Namaskāra in its modern 12-pose form was codified by the Raja of Aundh (Bhawanrao Shrinivasrao Pant Pratinidhi) in the early 20th century. He published </a:t>
+            </a:r>
             <a:pPr algn="l" indent="0" marL="0">
               <a:lnSpc>
-                <a:spcPts val="1680"/>
-              </a:lnSpc>
-              <a:spcBef>
-                <a:spcPts val="300"/>
-              </a:spcBef>
+                <a:spcPts val="1620"/>
+              </a:lnSpc>
               <a:spcAft>
                 <a:spcPts val="300"/>
               </a:spcAft>
@@ -3623,7 +4532,99 @@
                 <a:ea typeface="Georgia" pitchFamily="34" charset="-122"/>
                 <a:cs typeface="Georgia" pitchFamily="34" charset="-120"/>
               </a:rPr>
-              <a:t>Each row: # · Pose · Breath.</a:t>
+              <a:t>The Ten-Point Way to Health</a:t>
+            </a:r>
+            <a:pPr algn="l" indent="0" marL="0">
+              <a:lnSpc>
+                <a:spcPts val="1620"/>
+              </a:lnSpc>
+              <a:spcAft>
+                <a:spcPts val="300"/>
+              </a:spcAft>
+              <a:buNone/>
+            </a:pPr>
+            <a:r>
+              <a:rPr lang="en-US" sz="1200" dirty="0">
+                <a:solidFill>
+                  <a:srgbClr val="1A1A1A"/>
+                </a:solidFill>
+                <a:latin typeface="Georgia" pitchFamily="34" charset="0"/>
+                <a:ea typeface="Georgia" pitchFamily="34" charset="-122"/>
+                <a:cs typeface="Georgia" pitchFamily="34" charset="-120"/>
+              </a:rPr>
+              <a:t> in 1928, popularising the sequence.</a:t>
+            </a:r>
+            <a:endParaRPr lang="en-US" sz="1200" dirty="0"/>
+          </a:p>
+          <a:p>
+            <a:pPr algn="l" marL="342900" indent="-342900">
+              <a:lnSpc>
+                <a:spcPts val="1620"/>
+              </a:lnSpc>
+              <a:spcAft>
+                <a:spcPts val="300"/>
+              </a:spcAft>
+              <a:buSzPct val="100000"/>
+              <a:buChar char="•"/>
+            </a:pPr>
+            <a:r>
+              <a:rPr lang="en-US" sz="1200" dirty="0">
+                <a:solidFill>
+                  <a:srgbClr val="1A1A1A"/>
+                </a:solidFill>
+                <a:latin typeface="Georgia" pitchFamily="34" charset="0"/>
+                <a:ea typeface="Georgia" pitchFamily="34" charset="-122"/>
+                <a:cs typeface="Georgia" pitchFamily="34" charset="-120"/>
+              </a:rPr>
+              <a:t>The individual āsanas have older roots. The sequence does not.</a:t>
+            </a:r>
+            <a:endParaRPr lang="en-US" sz="1200" dirty="0"/>
+          </a:p>
+          <a:p>
+            <a:pPr algn="l" marL="342900" indent="-342900">
+              <a:lnSpc>
+                <a:spcPts val="1620"/>
+              </a:lnSpc>
+              <a:spcAft>
+                <a:spcPts val="300"/>
+              </a:spcAft>
+              <a:buSzPct val="100000"/>
+              <a:buChar char="•"/>
+            </a:pPr>
+            <a:r>
+              <a:rPr lang="en-US" sz="1200" dirty="0">
+                <a:solidFill>
+                  <a:srgbClr val="1A1A1A"/>
+                </a:solidFill>
+                <a:latin typeface="Georgia" pitchFamily="34" charset="0"/>
+                <a:ea typeface="Georgia" pitchFamily="34" charset="-122"/>
+                <a:cs typeface="Georgia" pitchFamily="34" charset="-120"/>
+              </a:rPr>
+              <a:t>This is one of many examples where modern postural yoga has a 20th-century pedigree, even when the Sanskrit names sound ancient.</a:t>
+            </a:r>
+            <a:endParaRPr lang="en-US" sz="1200" dirty="0"/>
+          </a:p>
+          <a:p>
+            <a:pPr algn="l" marL="342900" indent="-342900">
+              <a:lnSpc>
+                <a:spcPts val="1620"/>
+              </a:lnSpc>
+              <a:spcAft>
+                <a:spcPts val="300"/>
+              </a:spcAft>
+              <a:buSzPct val="100000"/>
+              <a:buChar char="•"/>
+            </a:pPr>
+            <a:r>
+              <a:rPr lang="en-US" sz="1200" dirty="0">
+                <a:solidFill>
+                  <a:srgbClr val="1A1A1A"/>
+                </a:solidFill>
+                <a:latin typeface="Georgia" pitchFamily="34" charset="0"/>
+                <a:ea typeface="Georgia" pitchFamily="34" charset="-122"/>
+                <a:cs typeface="Georgia" pitchFamily="34" charset="-120"/>
+              </a:rPr>
+              <a:t>(We return to this on Day 7.)</a:t>
             </a:r>
             <a:endParaRPr lang="en-US" sz="1200" dirty="0"/>
           </a:p>
@@ -3637,653 +4638,7 @@
         </p:nvSpPr>
         <p:spPr>
           <a:xfrm>
-            <a:off x="634901" y="1173063"/>
-            <a:ext cx="8102798" cy="2963466"/>
-          </a:xfrm>
-          <a:prstGeom prst="rect">
-            <a:avLst/>
-          </a:prstGeom>
-          <a:noFill/>
-          <a:ln/>
-        </p:spPr>
-        <p:txBody>
-          <a:bodyPr wrap="square" lIns="0" tIns="0" rIns="0" bIns="0" rtlCol="0" anchor="t"/>
-          <a:lstStyle/>
-          <a:p>
-            <a:pPr algn="l" marL="342900" indent="-342900">
-              <a:lnSpc>
-                <a:spcPts val="1620"/>
-              </a:lnSpc>
-              <a:spcAft>
-                <a:spcPts val="300"/>
-              </a:spcAft>
-              <a:buSzPct val="100000"/>
-              <a:buChar char="•"/>
-            </a:pPr>
-            <a:r>
-              <a:rPr lang="en-US" sz="1200" b="1" dirty="0">
-                <a:solidFill>
-                  <a:srgbClr val="1A1A1A"/>
-                </a:solidFill>
-                <a:latin typeface="Georgia" pitchFamily="34" charset="0"/>
-                <a:ea typeface="Georgia" pitchFamily="34" charset="-122"/>
-                <a:cs typeface="Georgia" pitchFamily="34" charset="-120"/>
-              </a:rPr>
-              <a:t>1</a:t>
-            </a:r>
-            <a:pPr algn="l" indent="0" marL="0">
-              <a:lnSpc>
-                <a:spcPts val="1620"/>
-              </a:lnSpc>
-              <a:spcAft>
-                <a:spcPts val="300"/>
-              </a:spcAft>
-              <a:buNone/>
-            </a:pPr>
-            <a:r>
-              <a:rPr lang="en-US" sz="1200" dirty="0">
-                <a:solidFill>
-                  <a:srgbClr val="1A1A1A"/>
-                </a:solidFill>
-                <a:latin typeface="Georgia" pitchFamily="34" charset="0"/>
-                <a:ea typeface="Georgia" pitchFamily="34" charset="-122"/>
-                <a:cs typeface="Georgia" pitchFamily="34" charset="-120"/>
-              </a:rPr>
-              <a:t> — Praṇāmāsana · exhale</a:t>
-            </a:r>
-            <a:endParaRPr lang="en-US" sz="1200" dirty="0"/>
-          </a:p>
-          <a:p>
-            <a:pPr algn="l" marL="342900" indent="-342900">
-              <a:lnSpc>
-                <a:spcPts val="1620"/>
-              </a:lnSpc>
-              <a:spcAft>
-                <a:spcPts val="300"/>
-              </a:spcAft>
-              <a:buSzPct val="100000"/>
-              <a:buChar char="•"/>
-            </a:pPr>
-            <a:r>
-              <a:rPr lang="en-US" sz="1200" b="1" dirty="0">
-                <a:solidFill>
-                  <a:srgbClr val="1A1A1A"/>
-                </a:solidFill>
-                <a:latin typeface="Georgia" pitchFamily="34" charset="0"/>
-                <a:ea typeface="Georgia" pitchFamily="34" charset="-122"/>
-                <a:cs typeface="Georgia" pitchFamily="34" charset="-120"/>
-              </a:rPr>
-              <a:t>2</a:t>
-            </a:r>
-            <a:pPr algn="l" indent="0" marL="0">
-              <a:lnSpc>
-                <a:spcPts val="1620"/>
-              </a:lnSpc>
-              <a:spcAft>
-                <a:spcPts val="300"/>
-              </a:spcAft>
-              <a:buNone/>
-            </a:pPr>
-            <a:r>
-              <a:rPr lang="en-US" sz="1200" dirty="0">
-                <a:solidFill>
-                  <a:srgbClr val="1A1A1A"/>
-                </a:solidFill>
-                <a:latin typeface="Georgia" pitchFamily="34" charset="0"/>
-                <a:ea typeface="Georgia" pitchFamily="34" charset="-122"/>
-                <a:cs typeface="Georgia" pitchFamily="34" charset="-120"/>
-              </a:rPr>
-              <a:t> — Hasta-uttānāsana · inhale</a:t>
-            </a:r>
-            <a:endParaRPr lang="en-US" sz="1200" dirty="0"/>
-          </a:p>
-          <a:p>
-            <a:pPr algn="l" marL="342900" indent="-342900">
-              <a:lnSpc>
-                <a:spcPts val="1620"/>
-              </a:lnSpc>
-              <a:spcAft>
-                <a:spcPts val="300"/>
-              </a:spcAft>
-              <a:buSzPct val="100000"/>
-              <a:buChar char="•"/>
-            </a:pPr>
-            <a:r>
-              <a:rPr lang="en-US" sz="1200" b="1" dirty="0">
-                <a:solidFill>
-                  <a:srgbClr val="1A1A1A"/>
-                </a:solidFill>
-                <a:latin typeface="Georgia" pitchFamily="34" charset="0"/>
-                <a:ea typeface="Georgia" pitchFamily="34" charset="-122"/>
-                <a:cs typeface="Georgia" pitchFamily="34" charset="-120"/>
-              </a:rPr>
-              <a:t>3</a:t>
-            </a:r>
-            <a:pPr algn="l" indent="0" marL="0">
-              <a:lnSpc>
-                <a:spcPts val="1620"/>
-              </a:lnSpc>
-              <a:spcAft>
-                <a:spcPts val="300"/>
-              </a:spcAft>
-              <a:buNone/>
-            </a:pPr>
-            <a:r>
-              <a:rPr lang="en-US" sz="1200" dirty="0">
-                <a:solidFill>
-                  <a:srgbClr val="1A1A1A"/>
-                </a:solidFill>
-                <a:latin typeface="Georgia" pitchFamily="34" charset="0"/>
-                <a:ea typeface="Georgia" pitchFamily="34" charset="-122"/>
-                <a:cs typeface="Georgia" pitchFamily="34" charset="-120"/>
-              </a:rPr>
-              <a:t> — Uttānāsana · exhale</a:t>
-            </a:r>
-            <a:endParaRPr lang="en-US" sz="1200" dirty="0"/>
-          </a:p>
-          <a:p>
-            <a:pPr algn="l" marL="342900" indent="-342900">
-              <a:lnSpc>
-                <a:spcPts val="1620"/>
-              </a:lnSpc>
-              <a:spcAft>
-                <a:spcPts val="300"/>
-              </a:spcAft>
-              <a:buSzPct val="100000"/>
-              <a:buChar char="•"/>
-            </a:pPr>
-            <a:r>
-              <a:rPr lang="en-US" sz="1200" b="1" dirty="0">
-                <a:solidFill>
-                  <a:srgbClr val="1A1A1A"/>
-                </a:solidFill>
-                <a:latin typeface="Georgia" pitchFamily="34" charset="0"/>
-                <a:ea typeface="Georgia" pitchFamily="34" charset="-122"/>
-                <a:cs typeface="Georgia" pitchFamily="34" charset="-120"/>
-              </a:rPr>
-              <a:t>4</a:t>
-            </a:r>
-            <a:pPr algn="l" indent="0" marL="0">
-              <a:lnSpc>
-                <a:spcPts val="1620"/>
-              </a:lnSpc>
-              <a:spcAft>
-                <a:spcPts val="300"/>
-              </a:spcAft>
-              <a:buNone/>
-            </a:pPr>
-            <a:r>
-              <a:rPr lang="en-US" sz="1200" dirty="0">
-                <a:solidFill>
-                  <a:srgbClr val="1A1A1A"/>
-                </a:solidFill>
-                <a:latin typeface="Georgia" pitchFamily="34" charset="0"/>
-                <a:ea typeface="Georgia" pitchFamily="34" charset="-122"/>
-                <a:cs typeface="Georgia" pitchFamily="34" charset="-120"/>
-              </a:rPr>
-              <a:t> — Aśva-sañcalanāsana · inhale</a:t>
-            </a:r>
-            <a:endParaRPr lang="en-US" sz="1200" dirty="0"/>
-          </a:p>
-          <a:p>
-            <a:pPr algn="l" marL="342900" indent="-342900">
-              <a:lnSpc>
-                <a:spcPts val="1620"/>
-              </a:lnSpc>
-              <a:spcAft>
-                <a:spcPts val="300"/>
-              </a:spcAft>
-              <a:buSzPct val="100000"/>
-              <a:buChar char="•"/>
-            </a:pPr>
-            <a:r>
-              <a:rPr lang="en-US" sz="1200" b="1" dirty="0">
-                <a:solidFill>
-                  <a:srgbClr val="1A1A1A"/>
-                </a:solidFill>
-                <a:latin typeface="Georgia" pitchFamily="34" charset="0"/>
-                <a:ea typeface="Georgia" pitchFamily="34" charset="-122"/>
-                <a:cs typeface="Georgia" pitchFamily="34" charset="-120"/>
-              </a:rPr>
-              <a:t>5</a:t>
-            </a:r>
-            <a:pPr algn="l" indent="0" marL="0">
-              <a:lnSpc>
-                <a:spcPts val="1620"/>
-              </a:lnSpc>
-              <a:spcAft>
-                <a:spcPts val="300"/>
-              </a:spcAft>
-              <a:buNone/>
-            </a:pPr>
-            <a:r>
-              <a:rPr lang="en-US" sz="1200" dirty="0">
-                <a:solidFill>
-                  <a:srgbClr val="1A1A1A"/>
-                </a:solidFill>
-                <a:latin typeface="Georgia" pitchFamily="34" charset="0"/>
-                <a:ea typeface="Georgia" pitchFamily="34" charset="-122"/>
-                <a:cs typeface="Georgia" pitchFamily="34" charset="-120"/>
-              </a:rPr>
-              <a:t> — Adho-mukha-śvānāsana · exhale</a:t>
-            </a:r>
-            <a:endParaRPr lang="en-US" sz="1200" dirty="0"/>
-          </a:p>
-          <a:p>
-            <a:pPr algn="l" marL="342900" indent="-342900">
-              <a:lnSpc>
-                <a:spcPts val="1620"/>
-              </a:lnSpc>
-              <a:spcAft>
-                <a:spcPts val="300"/>
-              </a:spcAft>
-              <a:buSzPct val="100000"/>
-              <a:buChar char="•"/>
-            </a:pPr>
-            <a:r>
-              <a:rPr lang="en-US" sz="1200" b="1" dirty="0">
-                <a:solidFill>
-                  <a:srgbClr val="1A1A1A"/>
-                </a:solidFill>
-                <a:latin typeface="Georgia" pitchFamily="34" charset="0"/>
-                <a:ea typeface="Georgia" pitchFamily="34" charset="-122"/>
-                <a:cs typeface="Georgia" pitchFamily="34" charset="-120"/>
-              </a:rPr>
-              <a:t>6</a:t>
-            </a:r>
-            <a:pPr algn="l" indent="0" marL="0">
-              <a:lnSpc>
-                <a:spcPts val="1620"/>
-              </a:lnSpc>
-              <a:spcAft>
-                <a:spcPts val="300"/>
-              </a:spcAft>
-              <a:buNone/>
-            </a:pPr>
-            <a:r>
-              <a:rPr lang="en-US" sz="1200" dirty="0">
-                <a:solidFill>
-                  <a:srgbClr val="1A1A1A"/>
-                </a:solidFill>
-                <a:latin typeface="Georgia" pitchFamily="34" charset="0"/>
-                <a:ea typeface="Georgia" pitchFamily="34" charset="-122"/>
-                <a:cs typeface="Georgia" pitchFamily="34" charset="-120"/>
-              </a:rPr>
-              <a:t> — Aṣṭāṅga-namaskāra · (brief hold)</a:t>
-            </a:r>
-            <a:endParaRPr lang="en-US" sz="1200" dirty="0"/>
-          </a:p>
-          <a:p>
-            <a:pPr algn="l" marL="342900" indent="-342900">
-              <a:lnSpc>
-                <a:spcPts val="1620"/>
-              </a:lnSpc>
-              <a:spcAft>
-                <a:spcPts val="300"/>
-              </a:spcAft>
-              <a:buSzPct val="100000"/>
-              <a:buChar char="•"/>
-            </a:pPr>
-            <a:r>
-              <a:rPr lang="en-US" sz="1200" b="1" dirty="0">
-                <a:solidFill>
-                  <a:srgbClr val="1A1A1A"/>
-                </a:solidFill>
-                <a:latin typeface="Georgia" pitchFamily="34" charset="0"/>
-                <a:ea typeface="Georgia" pitchFamily="34" charset="-122"/>
-                <a:cs typeface="Georgia" pitchFamily="34" charset="-120"/>
-              </a:rPr>
-              <a:t>7</a:t>
-            </a:r>
-            <a:pPr algn="l" indent="0" marL="0">
-              <a:lnSpc>
-                <a:spcPts val="1620"/>
-              </a:lnSpc>
-              <a:spcAft>
-                <a:spcPts val="300"/>
-              </a:spcAft>
-              <a:buNone/>
-            </a:pPr>
-            <a:r>
-              <a:rPr lang="en-US" sz="1200" dirty="0">
-                <a:solidFill>
-                  <a:srgbClr val="1A1A1A"/>
-                </a:solidFill>
-                <a:latin typeface="Georgia" pitchFamily="34" charset="0"/>
-                <a:ea typeface="Georgia" pitchFamily="34" charset="-122"/>
-                <a:cs typeface="Georgia" pitchFamily="34" charset="-120"/>
-              </a:rPr>
-              <a:t> — Bhujaṅgāsana · inhale</a:t>
-            </a:r>
-            <a:endParaRPr lang="en-US" sz="1200" dirty="0"/>
-          </a:p>
-          <a:p>
-            <a:pPr algn="l" marL="342900" indent="-342900">
-              <a:lnSpc>
-                <a:spcPts val="1620"/>
-              </a:lnSpc>
-              <a:spcAft>
-                <a:spcPts val="300"/>
-              </a:spcAft>
-              <a:buSzPct val="100000"/>
-              <a:buChar char="•"/>
-            </a:pPr>
-            <a:r>
-              <a:rPr lang="en-US" sz="1200" b="1" dirty="0">
-                <a:solidFill>
-                  <a:srgbClr val="1A1A1A"/>
-                </a:solidFill>
-                <a:latin typeface="Georgia" pitchFamily="34" charset="0"/>
-                <a:ea typeface="Georgia" pitchFamily="34" charset="-122"/>
-                <a:cs typeface="Georgia" pitchFamily="34" charset="-120"/>
-              </a:rPr>
-              <a:t>8</a:t>
-            </a:r>
-            <a:pPr algn="l" indent="0" marL="0">
-              <a:lnSpc>
-                <a:spcPts val="1620"/>
-              </a:lnSpc>
-              <a:spcAft>
-                <a:spcPts val="300"/>
-              </a:spcAft>
-              <a:buNone/>
-            </a:pPr>
-            <a:r>
-              <a:rPr lang="en-US" sz="1200" dirty="0">
-                <a:solidFill>
-                  <a:srgbClr val="1A1A1A"/>
-                </a:solidFill>
-                <a:latin typeface="Georgia" pitchFamily="34" charset="0"/>
-                <a:ea typeface="Georgia" pitchFamily="34" charset="-122"/>
-                <a:cs typeface="Georgia" pitchFamily="34" charset="-120"/>
-              </a:rPr>
-              <a:t> — Adho-mukha-śvānāsana · exhale</a:t>
-            </a:r>
-            <a:endParaRPr lang="en-US" sz="1200" dirty="0"/>
-          </a:p>
-          <a:p>
-            <a:pPr algn="l" marL="342900" indent="-342900">
-              <a:lnSpc>
-                <a:spcPts val="1620"/>
-              </a:lnSpc>
-              <a:spcAft>
-                <a:spcPts val="300"/>
-              </a:spcAft>
-              <a:buSzPct val="100000"/>
-              <a:buChar char="•"/>
-            </a:pPr>
-            <a:r>
-              <a:rPr lang="en-US" sz="1200" b="1" dirty="0">
-                <a:solidFill>
-                  <a:srgbClr val="1A1A1A"/>
-                </a:solidFill>
-                <a:latin typeface="Georgia" pitchFamily="34" charset="0"/>
-                <a:ea typeface="Georgia" pitchFamily="34" charset="-122"/>
-                <a:cs typeface="Georgia" pitchFamily="34" charset="-120"/>
-              </a:rPr>
-              <a:t>9</a:t>
-            </a:r>
-            <a:pPr algn="l" indent="0" marL="0">
-              <a:lnSpc>
-                <a:spcPts val="1620"/>
-              </a:lnSpc>
-              <a:spcAft>
-                <a:spcPts val="300"/>
-              </a:spcAft>
-              <a:buNone/>
-            </a:pPr>
-            <a:r>
-              <a:rPr lang="en-US" sz="1200" dirty="0">
-                <a:solidFill>
-                  <a:srgbClr val="1A1A1A"/>
-                </a:solidFill>
-                <a:latin typeface="Georgia" pitchFamily="34" charset="0"/>
-                <a:ea typeface="Georgia" pitchFamily="34" charset="-122"/>
-                <a:cs typeface="Georgia" pitchFamily="34" charset="-120"/>
-              </a:rPr>
-              <a:t> — Aśva-sañcalanāsana · inhale</a:t>
-            </a:r>
-            <a:endParaRPr lang="en-US" sz="1200" dirty="0"/>
-          </a:p>
-          <a:p>
-            <a:pPr algn="l" marL="342900" indent="-342900">
-              <a:lnSpc>
-                <a:spcPts val="1620"/>
-              </a:lnSpc>
-              <a:spcAft>
-                <a:spcPts val="300"/>
-              </a:spcAft>
-              <a:buSzPct val="100000"/>
-              <a:buChar char="•"/>
-            </a:pPr>
-            <a:r>
-              <a:rPr lang="en-US" sz="1200" b="1" dirty="0">
-                <a:solidFill>
-                  <a:srgbClr val="1A1A1A"/>
-                </a:solidFill>
-                <a:latin typeface="Georgia" pitchFamily="34" charset="0"/>
-                <a:ea typeface="Georgia" pitchFamily="34" charset="-122"/>
-                <a:cs typeface="Georgia" pitchFamily="34" charset="-120"/>
-              </a:rPr>
-              <a:t>10</a:t>
-            </a:r>
-            <a:pPr algn="l" indent="0" marL="0">
-              <a:lnSpc>
-                <a:spcPts val="1620"/>
-              </a:lnSpc>
-              <a:spcAft>
-                <a:spcPts val="300"/>
-              </a:spcAft>
-              <a:buNone/>
-            </a:pPr>
-            <a:r>
-              <a:rPr lang="en-US" sz="1200" dirty="0">
-                <a:solidFill>
-                  <a:srgbClr val="1A1A1A"/>
-                </a:solidFill>
-                <a:latin typeface="Georgia" pitchFamily="34" charset="0"/>
-                <a:ea typeface="Georgia" pitchFamily="34" charset="-122"/>
-                <a:cs typeface="Georgia" pitchFamily="34" charset="-120"/>
-              </a:rPr>
-              <a:t> — Uttānāsana · exhale</a:t>
-            </a:r>
-            <a:endParaRPr lang="en-US" sz="1200" dirty="0"/>
-          </a:p>
-          <a:p>
-            <a:pPr algn="l" marL="342900" indent="-342900">
-              <a:lnSpc>
-                <a:spcPts val="1620"/>
-              </a:lnSpc>
-              <a:spcAft>
-                <a:spcPts val="300"/>
-              </a:spcAft>
-              <a:buSzPct val="100000"/>
-              <a:buChar char="•"/>
-            </a:pPr>
-            <a:r>
-              <a:rPr lang="en-US" sz="1200" b="1" dirty="0">
-                <a:solidFill>
-                  <a:srgbClr val="1A1A1A"/>
-                </a:solidFill>
-                <a:latin typeface="Georgia" pitchFamily="34" charset="0"/>
-                <a:ea typeface="Georgia" pitchFamily="34" charset="-122"/>
-                <a:cs typeface="Georgia" pitchFamily="34" charset="-120"/>
-              </a:rPr>
-              <a:t>11</a:t>
-            </a:r>
-            <a:pPr algn="l" indent="0" marL="0">
-              <a:lnSpc>
-                <a:spcPts val="1620"/>
-              </a:lnSpc>
-              <a:spcAft>
-                <a:spcPts val="300"/>
-              </a:spcAft>
-              <a:buNone/>
-            </a:pPr>
-            <a:r>
-              <a:rPr lang="en-US" sz="1200" dirty="0">
-                <a:solidFill>
-                  <a:srgbClr val="1A1A1A"/>
-                </a:solidFill>
-                <a:latin typeface="Georgia" pitchFamily="34" charset="0"/>
-                <a:ea typeface="Georgia" pitchFamily="34" charset="-122"/>
-                <a:cs typeface="Georgia" pitchFamily="34" charset="-120"/>
-              </a:rPr>
-              <a:t> — Hasta-uttānāsana · inhale</a:t>
-            </a:r>
-            <a:endParaRPr lang="en-US" sz="1200" dirty="0"/>
-          </a:p>
-          <a:p>
-            <a:pPr algn="l" marL="342900" indent="-342900">
-              <a:lnSpc>
-                <a:spcPts val="1620"/>
-              </a:lnSpc>
-              <a:spcAft>
-                <a:spcPts val="300"/>
-              </a:spcAft>
-              <a:buSzPct val="100000"/>
-              <a:buChar char="•"/>
-            </a:pPr>
-            <a:r>
-              <a:rPr lang="en-US" sz="1200" b="1" dirty="0">
-                <a:solidFill>
-                  <a:srgbClr val="1A1A1A"/>
-                </a:solidFill>
-                <a:latin typeface="Georgia" pitchFamily="34" charset="0"/>
-                <a:ea typeface="Georgia" pitchFamily="34" charset="-122"/>
-                <a:cs typeface="Georgia" pitchFamily="34" charset="-120"/>
-              </a:rPr>
-              <a:t>12</a:t>
-            </a:r>
-            <a:pPr algn="l" indent="0" marL="0">
-              <a:lnSpc>
-                <a:spcPts val="1620"/>
-              </a:lnSpc>
-              <a:spcAft>
-                <a:spcPts val="300"/>
-              </a:spcAft>
-              <a:buNone/>
-            </a:pPr>
-            <a:r>
-              <a:rPr lang="en-US" sz="1200" dirty="0">
-                <a:solidFill>
-                  <a:srgbClr val="1A1A1A"/>
-                </a:solidFill>
-                <a:latin typeface="Georgia" pitchFamily="34" charset="0"/>
-                <a:ea typeface="Georgia" pitchFamily="34" charset="-122"/>
-                <a:cs typeface="Georgia" pitchFamily="34" charset="-120"/>
-              </a:rPr>
-              <a:t> — Praṇāmāsana · exhale</a:t>
-            </a:r>
-            <a:endParaRPr lang="en-US" sz="1200" dirty="0"/>
-          </a:p>
-        </p:txBody>
-      </p:sp>
-      <p:sp>
-        <p:nvSpPr>
-          <p:cNvPr id="6" name="Text 4"/>
-          <p:cNvSpPr/>
-          <p:nvPr/>
-        </p:nvSpPr>
-        <p:spPr>
-          <a:xfrm>
-            <a:off x="406301" y="4225379"/>
-            <a:ext cx="8498026" cy="213271"/>
-          </a:xfrm>
-          <a:prstGeom prst="rect">
-            <a:avLst/>
-          </a:prstGeom>
-          <a:noFill/>
-          <a:ln/>
-        </p:spPr>
-        <p:txBody>
-          <a:bodyPr wrap="square" lIns="0" tIns="0" rIns="0" bIns="0" rtlCol="0" anchor="t"/>
-          <a:lstStyle/>
-          <a:p>
-            <a:pPr algn="l" indent="0" marL="0">
-              <a:lnSpc>
-                <a:spcPts val="1680"/>
-              </a:lnSpc>
-              <a:spcBef>
-                <a:spcPts val="300"/>
-              </a:spcBef>
-              <a:spcAft>
-                <a:spcPts val="300"/>
-              </a:spcAft>
-              <a:buNone/>
-            </a:pPr>
-            <a:r>
-              <a:rPr lang="en-US" sz="1200" dirty="0">
-                <a:solidFill>
-                  <a:srgbClr val="1A1A1A"/>
-                </a:solidFill>
-                <a:latin typeface="Georgia" pitchFamily="34" charset="0"/>
-                <a:ea typeface="Georgia" pitchFamily="34" charset="-122"/>
-                <a:cs typeface="Georgia" pitchFamily="34" charset="-120"/>
-              </a:rPr>
-              <a:t>Round 1: slow, teacher-called. Round 2: at your own pace, breath-led.</a:t>
-            </a:r>
-            <a:endParaRPr lang="en-US" sz="1200" dirty="0"/>
-          </a:p>
-        </p:txBody>
-      </p:sp>
-      <p:sp>
-        <p:nvSpPr>
-          <p:cNvPr id="7" name="Text 5"/>
-          <p:cNvSpPr/>
-          <p:nvPr/>
-        </p:nvSpPr>
-        <p:spPr>
-          <a:xfrm>
-            <a:off x="406301" y="4514850"/>
-            <a:ext cx="8498026" cy="213271"/>
-          </a:xfrm>
-          <a:prstGeom prst="rect">
-            <a:avLst/>
-          </a:prstGeom>
-          <a:noFill/>
-          <a:ln/>
-        </p:spPr>
-        <p:txBody>
-          <a:bodyPr wrap="square" lIns="0" tIns="0" rIns="0" bIns="0" rtlCol="0" anchor="t"/>
-          <a:lstStyle/>
-          <a:p>
-            <a:pPr algn="l" indent="0" marL="0">
-              <a:lnSpc>
-                <a:spcPts val="1680"/>
-              </a:lnSpc>
-              <a:spcBef>
-                <a:spcPts val="300"/>
-              </a:spcBef>
-              <a:spcAft>
-                <a:spcPts val="300"/>
-              </a:spcAft>
-              <a:buNone/>
-            </a:pPr>
-            <a:r>
-              <a:rPr lang="en-US" sz="1200" dirty="0">
-                <a:solidFill>
-                  <a:srgbClr val="1A1A1A"/>
-                </a:solidFill>
-                <a:latin typeface="Georgia" pitchFamily="34" charset="0"/>
-                <a:ea typeface="Georgia" pitchFamily="34" charset="-122"/>
-                <a:cs typeface="Georgia" pitchFamily="34" charset="-120"/>
-              </a:rPr>
-              <a:t>Śavāsana for 2 min after.</a:t>
-            </a:r>
-            <a:endParaRPr lang="en-US" sz="1200" dirty="0"/>
-          </a:p>
-        </p:txBody>
-      </p:sp>
-      <p:sp>
-        <p:nvSpPr>
-          <p:cNvPr id="8" name="Text 6"/>
-          <p:cNvSpPr/>
-          <p:nvPr/>
-        </p:nvSpPr>
-        <p:spPr>
-          <a:xfrm>
-            <a:off x="406301" y="4880521"/>
+            <a:off x="406301" y="4434929"/>
             <a:ext cx="8498026" cy="213271"/>
           </a:xfrm>
           <a:prstGeom prst="rect">
@@ -4427,7 +4782,7 @@
                 <a:ea typeface="Times New Roman" pitchFamily="34" charset="-122"/>
                 <a:cs typeface="Times New Roman" pitchFamily="34" charset="-120"/>
               </a:rPr>
-              <a:t>Discussion (8 min)</a:t>
+              <a:t>Practice (20 min) — 2 rounds with breath</a:t>
             </a:r>
             <a:endParaRPr lang="en-US" sz="1800" dirty="0"/>
           </a:p>
@@ -4442,7 +4797,7 @@
         <p:spPr>
           <a:xfrm>
             <a:off x="406301" y="870942"/>
-            <a:ext cx="8498026" cy="426541"/>
+            <a:ext cx="8498026" cy="213271"/>
           </a:xfrm>
           <a:prstGeom prst="rect">
             <a:avLst/>
@@ -4467,29 +4822,6 @@
               <a:buNone/>
             </a:pPr>
             <a:r>
-              <a:rPr lang="en-US" sz="1200" dirty="0">
-                <a:solidFill>
-                  <a:srgbClr val="1A1A1A"/>
-                </a:solidFill>
-                <a:latin typeface="Georgia" pitchFamily="34" charset="0"/>
-                <a:ea typeface="Georgia" pitchFamily="34" charset="-122"/>
-                <a:cs typeface="Georgia" pitchFamily="34" charset="-120"/>
-              </a:rPr>
-              <a:t>– Did knowing the modern history change how the practice felt? Why or why not? – Patañjali's </a:t>
-            </a:r>
-            <a:pPr algn="l" indent="0" marL="0">
-              <a:lnSpc>
-                <a:spcPts val="1680"/>
-              </a:lnSpc>
-              <a:spcBef>
-                <a:spcPts val="300"/>
-              </a:spcBef>
-              <a:spcAft>
-                <a:spcPts val="300"/>
-              </a:spcAft>
-              <a:buNone/>
-            </a:pPr>
-            <a:r>
               <a:rPr lang="en-US" sz="1200" i="1" dirty="0">
                 <a:solidFill>
                   <a:srgbClr val="1A1A1A"/>
@@ -4498,30 +4830,7 @@
                 <a:ea typeface="Georgia" pitchFamily="34" charset="-122"/>
                 <a:cs typeface="Georgia" pitchFamily="34" charset="-120"/>
               </a:rPr>
-              <a:t>sthira-sukham</a:t>
-            </a:r>
-            <a:pPr algn="l" indent="0" marL="0">
-              <a:lnSpc>
-                <a:spcPts val="1680"/>
-              </a:lnSpc>
-              <a:spcBef>
-                <a:spcPts val="300"/>
-              </a:spcBef>
-              <a:spcAft>
-                <a:spcPts val="300"/>
-              </a:spcAft>
-              <a:buNone/>
-            </a:pPr>
-            <a:r>
-              <a:rPr lang="en-US" sz="1200" dirty="0">
-                <a:solidFill>
-                  <a:srgbClr val="1A1A1A"/>
-                </a:solidFill>
-                <a:latin typeface="Georgia" pitchFamily="34" charset="0"/>
-                <a:ea typeface="Georgia" pitchFamily="34" charset="-122"/>
-                <a:cs typeface="Georgia" pitchFamily="34" charset="-120"/>
-              </a:rPr>
-              <a:t> criterion — does Sūrya Namaskāra meet it?</a:t>
+              <a:t>Each row: # · Pose · Breath.</a:t>
             </a:r>
             <a:endParaRPr lang="en-US" sz="1200" dirty="0"/>
           </a:p>
@@ -4679,7 +4988,7 @@
                 <a:ea typeface="Times New Roman" pitchFamily="34" charset="-122"/>
                 <a:cs typeface="Times New Roman" pitchFamily="34" charset="-120"/>
               </a:rPr>
-              <a:t>Wrap-up (4 min)</a:t>
+              <a:t>Practice (20 min) — 2 rounds with breath (cont.)</a:t>
             </a:r>
             <a:endParaRPr lang="en-US" sz="1800" dirty="0"/>
           </a:p>
@@ -4693,8 +5002,8 @@
         </p:nvSpPr>
         <p:spPr>
           <a:xfrm>
-            <a:off x="406301" y="870942"/>
-            <a:ext cx="8498026" cy="213271"/>
+            <a:off x="634901" y="883593"/>
+            <a:ext cx="8102798" cy="2719685"/>
           </a:xfrm>
           <a:prstGeom prst="rect">
             <a:avLst/>
@@ -4706,13 +5015,31 @@
           <a:bodyPr wrap="square" lIns="0" tIns="0" rIns="0" bIns="0" rtlCol="0" anchor="t"/>
           <a:lstStyle/>
           <a:p>
+            <a:pPr algn="l" marL="342900" indent="-342900">
+              <a:lnSpc>
+                <a:spcPts val="1620"/>
+              </a:lnSpc>
+              <a:spcAft>
+                <a:spcPts val="300"/>
+              </a:spcAft>
+              <a:buSzPct val="100000"/>
+              <a:buChar char="•"/>
+            </a:pPr>
+            <a:r>
+              <a:rPr lang="en-US" sz="1200" b="1" dirty="0">
+                <a:solidFill>
+                  <a:srgbClr val="1A1A1A"/>
+                </a:solidFill>
+                <a:latin typeface="Georgia" pitchFamily="34" charset="0"/>
+                <a:ea typeface="Georgia" pitchFamily="34" charset="-122"/>
+                <a:cs typeface="Georgia" pitchFamily="34" charset="-120"/>
+              </a:rPr>
+              <a:t>1</a:t>
+            </a:r>
             <a:pPr algn="l" indent="0" marL="0">
               <a:lnSpc>
-                <a:spcPts val="1680"/>
-              </a:lnSpc>
-              <a:spcBef>
-                <a:spcPts val="300"/>
-              </a:spcBef>
+                <a:spcPts val="1620"/>
+              </a:lnSpc>
               <a:spcAft>
                 <a:spcPts val="300"/>
               </a:spcAft>
@@ -4727,30 +5054,447 @@
                 <a:ea typeface="Georgia" pitchFamily="34" charset="-122"/>
                 <a:cs typeface="Georgia" pitchFamily="34" charset="-120"/>
               </a:rPr>
-              <a:t>– Preview Day 5: </a:t>
+              <a:t> — Praṇāmāsana · exhale</a:t>
+            </a:r>
+            <a:endParaRPr lang="en-US" sz="1200" dirty="0"/>
+          </a:p>
+          <a:p>
+            <a:pPr algn="l" marL="342900" indent="-342900">
+              <a:lnSpc>
+                <a:spcPts val="1620"/>
+              </a:lnSpc>
+              <a:spcAft>
+                <a:spcPts val="300"/>
+              </a:spcAft>
+              <a:buSzPct val="100000"/>
+              <a:buChar char="•"/>
+            </a:pPr>
+            <a:r>
+              <a:rPr lang="en-US" sz="1200" b="1" dirty="0">
+                <a:solidFill>
+                  <a:srgbClr val="1A1A1A"/>
+                </a:solidFill>
+                <a:latin typeface="Georgia" pitchFamily="34" charset="0"/>
+                <a:ea typeface="Georgia" pitchFamily="34" charset="-122"/>
+                <a:cs typeface="Georgia" pitchFamily="34" charset="-120"/>
+              </a:rPr>
+              <a:t>2</a:t>
             </a:r>
             <a:pPr algn="l" indent="0" marL="0">
               <a:lnSpc>
-                <a:spcPts val="1680"/>
-              </a:lnSpc>
-              <a:spcBef>
-                <a:spcPts val="300"/>
-              </a:spcBef>
-              <a:spcAft>
-                <a:spcPts val="300"/>
-              </a:spcAft>
-              <a:buNone/>
-            </a:pPr>
-            <a:r>
-              <a:rPr lang="en-US" sz="1200" i="1" dirty="0">
-                <a:solidFill>
-                  <a:srgbClr val="1A1A1A"/>
-                </a:solidFill>
-                <a:latin typeface="Georgia" pitchFamily="34" charset="0"/>
-                <a:ea typeface="Georgia" pitchFamily="34" charset="-122"/>
-                <a:cs typeface="Georgia" pitchFamily="34" charset="-120"/>
-              </a:rPr>
-              <a:t>"Tomorrow — primary source reading on prāṇāyāma."</a:t>
+                <a:spcPts val="1620"/>
+              </a:lnSpc>
+              <a:spcAft>
+                <a:spcPts val="300"/>
+              </a:spcAft>
+              <a:buNone/>
+            </a:pPr>
+            <a:r>
+              <a:rPr lang="en-US" sz="1200" dirty="0">
+                <a:solidFill>
+                  <a:srgbClr val="1A1A1A"/>
+                </a:solidFill>
+                <a:latin typeface="Georgia" pitchFamily="34" charset="0"/>
+                <a:ea typeface="Georgia" pitchFamily="34" charset="-122"/>
+                <a:cs typeface="Georgia" pitchFamily="34" charset="-120"/>
+              </a:rPr>
+              <a:t> — Hasta-uttānāsana · inhale</a:t>
+            </a:r>
+            <a:endParaRPr lang="en-US" sz="1200" dirty="0"/>
+          </a:p>
+          <a:p>
+            <a:pPr algn="l" marL="342900" indent="-342900">
+              <a:lnSpc>
+                <a:spcPts val="1620"/>
+              </a:lnSpc>
+              <a:spcAft>
+                <a:spcPts val="300"/>
+              </a:spcAft>
+              <a:buSzPct val="100000"/>
+              <a:buChar char="•"/>
+            </a:pPr>
+            <a:r>
+              <a:rPr lang="en-US" sz="1200" b="1" dirty="0">
+                <a:solidFill>
+                  <a:srgbClr val="1A1A1A"/>
+                </a:solidFill>
+                <a:latin typeface="Georgia" pitchFamily="34" charset="0"/>
+                <a:ea typeface="Georgia" pitchFamily="34" charset="-122"/>
+                <a:cs typeface="Georgia" pitchFamily="34" charset="-120"/>
+              </a:rPr>
+              <a:t>3</a:t>
+            </a:r>
+            <a:pPr algn="l" indent="0" marL="0">
+              <a:lnSpc>
+                <a:spcPts val="1620"/>
+              </a:lnSpc>
+              <a:spcAft>
+                <a:spcPts val="300"/>
+              </a:spcAft>
+              <a:buNone/>
+            </a:pPr>
+            <a:r>
+              <a:rPr lang="en-US" sz="1200" dirty="0">
+                <a:solidFill>
+                  <a:srgbClr val="1A1A1A"/>
+                </a:solidFill>
+                <a:latin typeface="Georgia" pitchFamily="34" charset="0"/>
+                <a:ea typeface="Georgia" pitchFamily="34" charset="-122"/>
+                <a:cs typeface="Georgia" pitchFamily="34" charset="-120"/>
+              </a:rPr>
+              <a:t> — Uttānāsana · exhale</a:t>
+            </a:r>
+            <a:endParaRPr lang="en-US" sz="1200" dirty="0"/>
+          </a:p>
+          <a:p>
+            <a:pPr algn="l" marL="342900" indent="-342900">
+              <a:lnSpc>
+                <a:spcPts val="1620"/>
+              </a:lnSpc>
+              <a:spcAft>
+                <a:spcPts val="300"/>
+              </a:spcAft>
+              <a:buSzPct val="100000"/>
+              <a:buChar char="•"/>
+            </a:pPr>
+            <a:r>
+              <a:rPr lang="en-US" sz="1200" b="1" dirty="0">
+                <a:solidFill>
+                  <a:srgbClr val="1A1A1A"/>
+                </a:solidFill>
+                <a:latin typeface="Georgia" pitchFamily="34" charset="0"/>
+                <a:ea typeface="Georgia" pitchFamily="34" charset="-122"/>
+                <a:cs typeface="Georgia" pitchFamily="34" charset="-120"/>
+              </a:rPr>
+              <a:t>4</a:t>
+            </a:r>
+            <a:pPr algn="l" indent="0" marL="0">
+              <a:lnSpc>
+                <a:spcPts val="1620"/>
+              </a:lnSpc>
+              <a:spcAft>
+                <a:spcPts val="300"/>
+              </a:spcAft>
+              <a:buNone/>
+            </a:pPr>
+            <a:r>
+              <a:rPr lang="en-US" sz="1200" dirty="0">
+                <a:solidFill>
+                  <a:srgbClr val="1A1A1A"/>
+                </a:solidFill>
+                <a:latin typeface="Georgia" pitchFamily="34" charset="0"/>
+                <a:ea typeface="Georgia" pitchFamily="34" charset="-122"/>
+                <a:cs typeface="Georgia" pitchFamily="34" charset="-120"/>
+              </a:rPr>
+              <a:t> — Aśva-sañcalanāsana · inhale</a:t>
+            </a:r>
+            <a:endParaRPr lang="en-US" sz="1200" dirty="0"/>
+          </a:p>
+          <a:p>
+            <a:pPr algn="l" marL="342900" indent="-342900">
+              <a:lnSpc>
+                <a:spcPts val="1620"/>
+              </a:lnSpc>
+              <a:spcAft>
+                <a:spcPts val="300"/>
+              </a:spcAft>
+              <a:buSzPct val="100000"/>
+              <a:buChar char="•"/>
+            </a:pPr>
+            <a:r>
+              <a:rPr lang="en-US" sz="1200" b="1" dirty="0">
+                <a:solidFill>
+                  <a:srgbClr val="1A1A1A"/>
+                </a:solidFill>
+                <a:latin typeface="Georgia" pitchFamily="34" charset="0"/>
+                <a:ea typeface="Georgia" pitchFamily="34" charset="-122"/>
+                <a:cs typeface="Georgia" pitchFamily="34" charset="-120"/>
+              </a:rPr>
+              <a:t>5</a:t>
+            </a:r>
+            <a:pPr algn="l" indent="0" marL="0">
+              <a:lnSpc>
+                <a:spcPts val="1620"/>
+              </a:lnSpc>
+              <a:spcAft>
+                <a:spcPts val="300"/>
+              </a:spcAft>
+              <a:buNone/>
+            </a:pPr>
+            <a:r>
+              <a:rPr lang="en-US" sz="1200" dirty="0">
+                <a:solidFill>
+                  <a:srgbClr val="1A1A1A"/>
+                </a:solidFill>
+                <a:latin typeface="Georgia" pitchFamily="34" charset="0"/>
+                <a:ea typeface="Georgia" pitchFamily="34" charset="-122"/>
+                <a:cs typeface="Georgia" pitchFamily="34" charset="-120"/>
+              </a:rPr>
+              <a:t> — Adho-mukha-śvānāsana · exhale</a:t>
+            </a:r>
+            <a:endParaRPr lang="en-US" sz="1200" dirty="0"/>
+          </a:p>
+          <a:p>
+            <a:pPr algn="l" marL="342900" indent="-342900">
+              <a:lnSpc>
+                <a:spcPts val="1620"/>
+              </a:lnSpc>
+              <a:spcAft>
+                <a:spcPts val="300"/>
+              </a:spcAft>
+              <a:buSzPct val="100000"/>
+              <a:buChar char="•"/>
+            </a:pPr>
+            <a:r>
+              <a:rPr lang="en-US" sz="1200" b="1" dirty="0">
+                <a:solidFill>
+                  <a:srgbClr val="1A1A1A"/>
+                </a:solidFill>
+                <a:latin typeface="Georgia" pitchFamily="34" charset="0"/>
+                <a:ea typeface="Georgia" pitchFamily="34" charset="-122"/>
+                <a:cs typeface="Georgia" pitchFamily="34" charset="-120"/>
+              </a:rPr>
+              <a:t>6</a:t>
+            </a:r>
+            <a:pPr algn="l" indent="0" marL="0">
+              <a:lnSpc>
+                <a:spcPts val="1620"/>
+              </a:lnSpc>
+              <a:spcAft>
+                <a:spcPts val="300"/>
+              </a:spcAft>
+              <a:buNone/>
+            </a:pPr>
+            <a:r>
+              <a:rPr lang="en-US" sz="1200" dirty="0">
+                <a:solidFill>
+                  <a:srgbClr val="1A1A1A"/>
+                </a:solidFill>
+                <a:latin typeface="Georgia" pitchFamily="34" charset="0"/>
+                <a:ea typeface="Georgia" pitchFamily="34" charset="-122"/>
+                <a:cs typeface="Georgia" pitchFamily="34" charset="-120"/>
+              </a:rPr>
+              <a:t> — Aṣṭāṅga-namaskāra · (brief hold)</a:t>
+            </a:r>
+            <a:endParaRPr lang="en-US" sz="1200" dirty="0"/>
+          </a:p>
+          <a:p>
+            <a:pPr algn="l" marL="342900" indent="-342900">
+              <a:lnSpc>
+                <a:spcPts val="1620"/>
+              </a:lnSpc>
+              <a:spcAft>
+                <a:spcPts val="300"/>
+              </a:spcAft>
+              <a:buSzPct val="100000"/>
+              <a:buChar char="•"/>
+            </a:pPr>
+            <a:r>
+              <a:rPr lang="en-US" sz="1200" b="1" dirty="0">
+                <a:solidFill>
+                  <a:srgbClr val="1A1A1A"/>
+                </a:solidFill>
+                <a:latin typeface="Georgia" pitchFamily="34" charset="0"/>
+                <a:ea typeface="Georgia" pitchFamily="34" charset="-122"/>
+                <a:cs typeface="Georgia" pitchFamily="34" charset="-120"/>
+              </a:rPr>
+              <a:t>7</a:t>
+            </a:r>
+            <a:pPr algn="l" indent="0" marL="0">
+              <a:lnSpc>
+                <a:spcPts val="1620"/>
+              </a:lnSpc>
+              <a:spcAft>
+                <a:spcPts val="300"/>
+              </a:spcAft>
+              <a:buNone/>
+            </a:pPr>
+            <a:r>
+              <a:rPr lang="en-US" sz="1200" dirty="0">
+                <a:solidFill>
+                  <a:srgbClr val="1A1A1A"/>
+                </a:solidFill>
+                <a:latin typeface="Georgia" pitchFamily="34" charset="0"/>
+                <a:ea typeface="Georgia" pitchFamily="34" charset="-122"/>
+                <a:cs typeface="Georgia" pitchFamily="34" charset="-120"/>
+              </a:rPr>
+              <a:t> — Bhujaṅgāsana · inhale</a:t>
+            </a:r>
+            <a:endParaRPr lang="en-US" sz="1200" dirty="0"/>
+          </a:p>
+          <a:p>
+            <a:pPr algn="l" marL="342900" indent="-342900">
+              <a:lnSpc>
+                <a:spcPts val="1620"/>
+              </a:lnSpc>
+              <a:spcAft>
+                <a:spcPts val="300"/>
+              </a:spcAft>
+              <a:buSzPct val="100000"/>
+              <a:buChar char="•"/>
+            </a:pPr>
+            <a:r>
+              <a:rPr lang="en-US" sz="1200" b="1" dirty="0">
+                <a:solidFill>
+                  <a:srgbClr val="1A1A1A"/>
+                </a:solidFill>
+                <a:latin typeface="Georgia" pitchFamily="34" charset="0"/>
+                <a:ea typeface="Georgia" pitchFamily="34" charset="-122"/>
+                <a:cs typeface="Georgia" pitchFamily="34" charset="-120"/>
+              </a:rPr>
+              <a:t>8</a:t>
+            </a:r>
+            <a:pPr algn="l" indent="0" marL="0">
+              <a:lnSpc>
+                <a:spcPts val="1620"/>
+              </a:lnSpc>
+              <a:spcAft>
+                <a:spcPts val="300"/>
+              </a:spcAft>
+              <a:buNone/>
+            </a:pPr>
+            <a:r>
+              <a:rPr lang="en-US" sz="1200" dirty="0">
+                <a:solidFill>
+                  <a:srgbClr val="1A1A1A"/>
+                </a:solidFill>
+                <a:latin typeface="Georgia" pitchFamily="34" charset="0"/>
+                <a:ea typeface="Georgia" pitchFamily="34" charset="-122"/>
+                <a:cs typeface="Georgia" pitchFamily="34" charset="-120"/>
+              </a:rPr>
+              <a:t> — Adho-mukha-śvānāsana · exhale</a:t>
+            </a:r>
+            <a:endParaRPr lang="en-US" sz="1200" dirty="0"/>
+          </a:p>
+          <a:p>
+            <a:pPr algn="l" marL="342900" indent="-342900">
+              <a:lnSpc>
+                <a:spcPts val="1620"/>
+              </a:lnSpc>
+              <a:spcAft>
+                <a:spcPts val="300"/>
+              </a:spcAft>
+              <a:buSzPct val="100000"/>
+              <a:buChar char="•"/>
+            </a:pPr>
+            <a:r>
+              <a:rPr lang="en-US" sz="1200" b="1" dirty="0">
+                <a:solidFill>
+                  <a:srgbClr val="1A1A1A"/>
+                </a:solidFill>
+                <a:latin typeface="Georgia" pitchFamily="34" charset="0"/>
+                <a:ea typeface="Georgia" pitchFamily="34" charset="-122"/>
+                <a:cs typeface="Georgia" pitchFamily="34" charset="-120"/>
+              </a:rPr>
+              <a:t>9</a:t>
+            </a:r>
+            <a:pPr algn="l" indent="0" marL="0">
+              <a:lnSpc>
+                <a:spcPts val="1620"/>
+              </a:lnSpc>
+              <a:spcAft>
+                <a:spcPts val="300"/>
+              </a:spcAft>
+              <a:buNone/>
+            </a:pPr>
+            <a:r>
+              <a:rPr lang="en-US" sz="1200" dirty="0">
+                <a:solidFill>
+                  <a:srgbClr val="1A1A1A"/>
+                </a:solidFill>
+                <a:latin typeface="Georgia" pitchFamily="34" charset="0"/>
+                <a:ea typeface="Georgia" pitchFamily="34" charset="-122"/>
+                <a:cs typeface="Georgia" pitchFamily="34" charset="-120"/>
+              </a:rPr>
+              <a:t> — Aśva-sañcalanāsana · inhale</a:t>
+            </a:r>
+            <a:endParaRPr lang="en-US" sz="1200" dirty="0"/>
+          </a:p>
+          <a:p>
+            <a:pPr algn="l" marL="342900" indent="-342900">
+              <a:lnSpc>
+                <a:spcPts val="1620"/>
+              </a:lnSpc>
+              <a:spcAft>
+                <a:spcPts val="300"/>
+              </a:spcAft>
+              <a:buSzPct val="100000"/>
+              <a:buChar char="•"/>
+            </a:pPr>
+            <a:r>
+              <a:rPr lang="en-US" sz="1200" b="1" dirty="0">
+                <a:solidFill>
+                  <a:srgbClr val="1A1A1A"/>
+                </a:solidFill>
+                <a:latin typeface="Georgia" pitchFamily="34" charset="0"/>
+                <a:ea typeface="Georgia" pitchFamily="34" charset="-122"/>
+                <a:cs typeface="Georgia" pitchFamily="34" charset="-120"/>
+              </a:rPr>
+              <a:t>10</a:t>
+            </a:r>
+            <a:pPr algn="l" indent="0" marL="0">
+              <a:lnSpc>
+                <a:spcPts val="1620"/>
+              </a:lnSpc>
+              <a:spcAft>
+                <a:spcPts val="300"/>
+              </a:spcAft>
+              <a:buNone/>
+            </a:pPr>
+            <a:r>
+              <a:rPr lang="en-US" sz="1200" dirty="0">
+                <a:solidFill>
+                  <a:srgbClr val="1A1A1A"/>
+                </a:solidFill>
+                <a:latin typeface="Georgia" pitchFamily="34" charset="0"/>
+                <a:ea typeface="Georgia" pitchFamily="34" charset="-122"/>
+                <a:cs typeface="Georgia" pitchFamily="34" charset="-120"/>
+              </a:rPr>
+              <a:t> — Uttānāsana · exhale</a:t>
+            </a:r>
+            <a:endParaRPr lang="en-US" sz="1200" dirty="0"/>
+          </a:p>
+          <a:p>
+            <a:pPr algn="l" marL="342900" indent="-342900">
+              <a:lnSpc>
+                <a:spcPts val="1620"/>
+              </a:lnSpc>
+              <a:spcAft>
+                <a:spcPts val="300"/>
+              </a:spcAft>
+              <a:buSzPct val="100000"/>
+              <a:buChar char="•"/>
+            </a:pPr>
+            <a:r>
+              <a:rPr lang="en-US" sz="1200" b="1" dirty="0">
+                <a:solidFill>
+                  <a:srgbClr val="1A1A1A"/>
+                </a:solidFill>
+                <a:latin typeface="Georgia" pitchFamily="34" charset="0"/>
+                <a:ea typeface="Georgia" pitchFamily="34" charset="-122"/>
+                <a:cs typeface="Georgia" pitchFamily="34" charset="-120"/>
+              </a:rPr>
+              <a:t>11</a:t>
+            </a:r>
+            <a:pPr algn="l" indent="0" marL="0">
+              <a:lnSpc>
+                <a:spcPts val="1620"/>
+              </a:lnSpc>
+              <a:spcAft>
+                <a:spcPts val="300"/>
+              </a:spcAft>
+              <a:buNone/>
+            </a:pPr>
+            <a:r>
+              <a:rPr lang="en-US" sz="1200" dirty="0">
+                <a:solidFill>
+                  <a:srgbClr val="1A1A1A"/>
+                </a:solidFill>
+                <a:latin typeface="Georgia" pitchFamily="34" charset="0"/>
+                <a:ea typeface="Georgia" pitchFamily="34" charset="-122"/>
+                <a:cs typeface="Georgia" pitchFamily="34" charset="-120"/>
+              </a:rPr>
+              <a:t> — Hasta-uttānāsana · inhale</a:t>
             </a:r>
             <a:endParaRPr lang="en-US" sz="1200" dirty="0"/>
           </a:p>
@@ -4908,7 +5652,7 @@
                 <a:ea typeface="Times New Roman" pitchFamily="34" charset="-122"/>
                 <a:cs typeface="Times New Roman" pitchFamily="34" charset="-120"/>
               </a:rPr>
-              <a:t>Differentiation</a:t>
+              <a:t>Practice (20 min) — 2 rounds with breath (cont.)</a:t>
             </a:r>
             <a:endParaRPr lang="en-US" sz="1800" dirty="0"/>
           </a:p>
@@ -4923,7 +5667,7 @@
         <p:spPr>
           <a:xfrm>
             <a:off x="634901" y="883593"/>
-            <a:ext cx="8102798" cy="525661"/>
+            <a:ext cx="8102798" cy="281880"/>
           </a:xfrm>
           <a:prstGeom prst="rect">
             <a:avLst/>
@@ -4954,7 +5698,7 @@
                 <a:ea typeface="Georgia" pitchFamily="34" charset="-122"/>
                 <a:cs typeface="Georgia" pitchFamily="34" charset="-120"/>
               </a:rPr>
-              <a:t>Tier up:</a:t>
+              <a:t>12</a:t>
             </a:r>
             <a:pPr algn="l" indent="0" marL="0">
               <a:lnSpc>
@@ -4974,36 +5718,40 @@
                 <a:ea typeface="Georgia" pitchFamily="34" charset="-122"/>
                 <a:cs typeface="Georgia" pitchFamily="34" charset="-120"/>
               </a:rPr>
-              <a:t> Read about the Krishnamacharya lineage (Singleton ch. 8 brief).</a:t>
+              <a:t> — Praṇāmāsana · exhale</a:t>
             </a:r>
             <a:endParaRPr lang="en-US" sz="1200" dirty="0"/>
           </a:p>
-          <a:p>
-            <a:pPr algn="l" marL="342900" indent="-342900">
-              <a:lnSpc>
-                <a:spcPts val="1620"/>
-              </a:lnSpc>
-              <a:spcAft>
-                <a:spcPts val="300"/>
-              </a:spcAft>
-              <a:buSzPct val="100000"/>
-              <a:buChar char="•"/>
-            </a:pPr>
-            <a:r>
-              <a:rPr lang="en-US" sz="1200" b="1" dirty="0">
-                <a:solidFill>
-                  <a:srgbClr val="1A1A1A"/>
-                </a:solidFill>
-                <a:latin typeface="Georgia" pitchFamily="34" charset="0"/>
-                <a:ea typeface="Georgia" pitchFamily="34" charset="-122"/>
-                <a:cs typeface="Georgia" pitchFamily="34" charset="-120"/>
-              </a:rPr>
-              <a:t>Tier down:</a:t>
-            </a:r>
+        </p:txBody>
+      </p:sp>
+      <p:sp>
+        <p:nvSpPr>
+          <p:cNvPr id="5" name="Text 3"/>
+          <p:cNvSpPr/>
+          <p:nvPr/>
+        </p:nvSpPr>
+        <p:spPr>
+          <a:xfrm>
+            <a:off x="406301" y="1254323"/>
+            <a:ext cx="8498026" cy="213271"/>
+          </a:xfrm>
+          <a:prstGeom prst="rect">
+            <a:avLst/>
+          </a:prstGeom>
+          <a:noFill/>
+          <a:ln/>
+        </p:spPr>
+        <p:txBody>
+          <a:bodyPr wrap="square" lIns="0" tIns="0" rIns="0" bIns="0" rtlCol="0" anchor="t"/>
+          <a:lstStyle/>
+          <a:p>
             <a:pPr algn="l" indent="0" marL="0">
               <a:lnSpc>
-                <a:spcPts val="1620"/>
-              </a:lnSpc>
+                <a:spcPts val="1680"/>
+              </a:lnSpc>
+              <a:spcBef>
+                <a:spcPts val="300"/>
+              </a:spcBef>
               <a:spcAft>
                 <a:spcPts val="300"/>
               </a:spcAft>
@@ -5018,7 +5766,7 @@
                 <a:ea typeface="Georgia" pitchFamily="34" charset="-122"/>
                 <a:cs typeface="Georgia" pitchFamily="34" charset="-120"/>
               </a:rPr>
-              <a:t> 1 round at slower pace; focus on breath co-ordination.</a:t>
+              <a:t>Round 1: slow, teacher-called. Round 2: at your own pace, breath-led.</a:t>
             </a:r>
             <a:endParaRPr lang="en-US" sz="1200" dirty="0"/>
           </a:p>
@@ -5026,7 +5774,55 @@
       </p:sp>
       <p:sp>
         <p:nvSpPr>
-          <p:cNvPr id="5" name="Text 3"/>
+          <p:cNvPr id="6" name="Text 4"/>
+          <p:cNvSpPr/>
+          <p:nvPr/>
+        </p:nvSpPr>
+        <p:spPr>
+          <a:xfrm>
+            <a:off x="406301" y="1543794"/>
+            <a:ext cx="8498026" cy="213271"/>
+          </a:xfrm>
+          <a:prstGeom prst="rect">
+            <a:avLst/>
+          </a:prstGeom>
+          <a:noFill/>
+          <a:ln/>
+        </p:spPr>
+        <p:txBody>
+          <a:bodyPr wrap="square" lIns="0" tIns="0" rIns="0" bIns="0" rtlCol="0" anchor="t"/>
+          <a:lstStyle/>
+          <a:p>
+            <a:pPr algn="l" indent="0" marL="0">
+              <a:lnSpc>
+                <a:spcPts val="1680"/>
+              </a:lnSpc>
+              <a:spcBef>
+                <a:spcPts val="300"/>
+              </a:spcBef>
+              <a:spcAft>
+                <a:spcPts val="300"/>
+              </a:spcAft>
+              <a:buNone/>
+            </a:pPr>
+            <a:r>
+              <a:rPr lang="en-US" sz="1200" dirty="0">
+                <a:solidFill>
+                  <a:srgbClr val="1A1A1A"/>
+                </a:solidFill>
+                <a:latin typeface="Georgia" pitchFamily="34" charset="0"/>
+                <a:ea typeface="Georgia" pitchFamily="34" charset="-122"/>
+                <a:cs typeface="Georgia" pitchFamily="34" charset="-120"/>
+              </a:rPr>
+              <a:t>Śavāsana for 2 min after.</a:t>
+            </a:r>
+            <a:endParaRPr lang="en-US" sz="1200" dirty="0"/>
+          </a:p>
+        </p:txBody>
+      </p:sp>
+      <p:sp>
+        <p:nvSpPr>
+          <p:cNvPr id="7" name="Text 5"/>
           <p:cNvSpPr/>
           <p:nvPr/>
         </p:nvSpPr>
